--- a/presentation/Thomas_Hansen_Housing_Recommendation.pptx
+++ b/presentation/Thomas_Hansen_Housing_Recommendation.pptx
@@ -4,18 +4,22 @@
   <p:sldMasterIdLst>
     <p:sldMasterId id="2147483648" r:id="rId1"/>
   </p:sldMasterIdLst>
+  <p:notesMasterIdLst>
+    <p:notesMasterId r:id="rId14"/>
+  </p:notesMasterIdLst>
   <p:sldIdLst>
     <p:sldId id="256" r:id="rId2"/>
     <p:sldId id="257" r:id="rId3"/>
     <p:sldId id="258" r:id="rId4"/>
     <p:sldId id="259" r:id="rId5"/>
-    <p:sldId id="260" r:id="rId6"/>
+    <p:sldId id="268" r:id="rId6"/>
     <p:sldId id="261" r:id="rId7"/>
     <p:sldId id="262" r:id="rId8"/>
     <p:sldId id="263" r:id="rId9"/>
-    <p:sldId id="264" r:id="rId10"/>
-    <p:sldId id="265" r:id="rId11"/>
-    <p:sldId id="266" r:id="rId12"/>
+    <p:sldId id="267" r:id="rId10"/>
+    <p:sldId id="269" r:id="rId11"/>
+    <p:sldId id="265" r:id="rId12"/>
+    <p:sldId id="266" r:id="rId13"/>
   </p:sldIdLst>
   <p:sldSz cx="12192000" cy="6858000"/>
   <p:notesSz cx="6858000" cy="9144000"/>
@@ -133,6 +137,439 @@
 </p:presentation>
 </file>
 
+<file path=ppt/notesMasters/notesMaster1.xml><?xml version="1.0" encoding="utf-8"?>
+<p:notesMaster xmlns:a="http://schemas.openxmlformats.org/drawingml/2006/main" xmlns:r="http://schemas.openxmlformats.org/officeDocument/2006/relationships" xmlns:p="http://schemas.openxmlformats.org/presentationml/2006/main">
+  <p:cSld>
+    <p:bg>
+      <p:bgRef idx="1001">
+        <a:schemeClr val="bg1"/>
+      </p:bgRef>
+    </p:bg>
+    <p:spTree>
+      <p:nvGrpSpPr>
+        <p:cNvPr id="1" name=""/>
+        <p:cNvGrpSpPr/>
+        <p:nvPr/>
+      </p:nvGrpSpPr>
+      <p:grpSpPr>
+        <a:xfrm>
+          <a:off x="0" y="0"/>
+          <a:ext cx="0" cy="0"/>
+          <a:chOff x="0" y="0"/>
+          <a:chExt cx="0" cy="0"/>
+        </a:xfrm>
+      </p:grpSpPr>
+      <p:sp>
+        <p:nvSpPr>
+          <p:cNvPr id="2" name="Header Placeholder 1"/>
+          <p:cNvSpPr>
+            <a:spLocks noGrp="1"/>
+          </p:cNvSpPr>
+          <p:nvPr>
+            <p:ph type="hdr" sz="quarter"/>
+          </p:nvPr>
+        </p:nvSpPr>
+        <p:spPr>
+          <a:xfrm>
+            <a:off x="0" y="0"/>
+            <a:ext cx="2971800" cy="458788"/>
+          </a:xfrm>
+          <a:prstGeom prst="rect">
+            <a:avLst/>
+          </a:prstGeom>
+        </p:spPr>
+        <p:txBody>
+          <a:bodyPr vert="horz" lIns="91440" tIns="45720" rIns="91440" bIns="45720" rtlCol="0"/>
+          <a:lstStyle>
+            <a:lvl1pPr algn="l">
+              <a:defRPr sz="1200"/>
+            </a:lvl1pPr>
+          </a:lstStyle>
+          <a:p>
+            <a:endParaRPr lang="en-US"/>
+          </a:p>
+        </p:txBody>
+      </p:sp>
+      <p:sp>
+        <p:nvSpPr>
+          <p:cNvPr id="3" name="Date Placeholder 2"/>
+          <p:cNvSpPr>
+            <a:spLocks noGrp="1"/>
+          </p:cNvSpPr>
+          <p:nvPr>
+            <p:ph type="dt" idx="1"/>
+          </p:nvPr>
+        </p:nvSpPr>
+        <p:spPr>
+          <a:xfrm>
+            <a:off x="3884613" y="0"/>
+            <a:ext cx="2971800" cy="458788"/>
+          </a:xfrm>
+          <a:prstGeom prst="rect">
+            <a:avLst/>
+          </a:prstGeom>
+        </p:spPr>
+        <p:txBody>
+          <a:bodyPr vert="horz" lIns="91440" tIns="45720" rIns="91440" bIns="45720" rtlCol="0"/>
+          <a:lstStyle>
+            <a:lvl1pPr algn="r">
+              <a:defRPr sz="1200"/>
+            </a:lvl1pPr>
+          </a:lstStyle>
+          <a:p>
+            <a:fld id="{4F78946F-5DF8-4A33-8C51-79D8471AD9E3}" type="datetimeFigureOut">
+              <a:rPr lang="en-US" smtClean="0"/>
+              <a:t>9/18/2026</a:t>
+            </a:fld>
+            <a:endParaRPr lang="en-US"/>
+          </a:p>
+        </p:txBody>
+      </p:sp>
+      <p:sp>
+        <p:nvSpPr>
+          <p:cNvPr id="4" name="Slide Image Placeholder 3"/>
+          <p:cNvSpPr>
+            <a:spLocks noGrp="1" noRot="1" noChangeAspect="1"/>
+          </p:cNvSpPr>
+          <p:nvPr>
+            <p:ph type="sldImg" idx="2"/>
+          </p:nvPr>
+        </p:nvSpPr>
+        <p:spPr>
+          <a:xfrm>
+            <a:off x="685800" y="1143000"/>
+            <a:ext cx="5486400" cy="3086100"/>
+          </a:xfrm>
+          <a:prstGeom prst="rect">
+            <a:avLst/>
+          </a:prstGeom>
+          <a:noFill/>
+          <a:ln w="12700">
+            <a:solidFill>
+              <a:prstClr val="black"/>
+            </a:solidFill>
+          </a:ln>
+        </p:spPr>
+        <p:txBody>
+          <a:bodyPr vert="horz" lIns="91440" tIns="45720" rIns="91440" bIns="45720" rtlCol="0" anchor="ctr"/>
+          <a:lstStyle/>
+          <a:p>
+            <a:endParaRPr lang="en-US"/>
+          </a:p>
+        </p:txBody>
+      </p:sp>
+      <p:sp>
+        <p:nvSpPr>
+          <p:cNvPr id="5" name="Notes Placeholder 4"/>
+          <p:cNvSpPr>
+            <a:spLocks noGrp="1"/>
+          </p:cNvSpPr>
+          <p:nvPr>
+            <p:ph type="body" sz="quarter" idx="3"/>
+          </p:nvPr>
+        </p:nvSpPr>
+        <p:spPr>
+          <a:xfrm>
+            <a:off x="685800" y="4400550"/>
+            <a:ext cx="5486400" cy="3600450"/>
+          </a:xfrm>
+          <a:prstGeom prst="rect">
+            <a:avLst/>
+          </a:prstGeom>
+        </p:spPr>
+        <p:txBody>
+          <a:bodyPr vert="horz" lIns="91440" tIns="45720" rIns="91440" bIns="45720" rtlCol="0"/>
+          <a:lstStyle/>
+          <a:p>
+            <a:pPr lvl="0"/>
+            <a:r>
+              <a:rPr lang="en-US"/>
+              <a:t>Click to edit Master text styles</a:t>
+            </a:r>
+          </a:p>
+          <a:p>
+            <a:pPr lvl="1"/>
+            <a:r>
+              <a:rPr lang="en-US"/>
+              <a:t>Second level</a:t>
+            </a:r>
+          </a:p>
+          <a:p>
+            <a:pPr lvl="2"/>
+            <a:r>
+              <a:rPr lang="en-US"/>
+              <a:t>Third level</a:t>
+            </a:r>
+          </a:p>
+          <a:p>
+            <a:pPr lvl="3"/>
+            <a:r>
+              <a:rPr lang="en-US"/>
+              <a:t>Fourth level</a:t>
+            </a:r>
+          </a:p>
+          <a:p>
+            <a:pPr lvl="4"/>
+            <a:r>
+              <a:rPr lang="en-US"/>
+              <a:t>Fifth level</a:t>
+            </a:r>
+          </a:p>
+        </p:txBody>
+      </p:sp>
+      <p:sp>
+        <p:nvSpPr>
+          <p:cNvPr id="6" name="Footer Placeholder 5"/>
+          <p:cNvSpPr>
+            <a:spLocks noGrp="1"/>
+          </p:cNvSpPr>
+          <p:nvPr>
+            <p:ph type="ftr" sz="quarter" idx="4"/>
+          </p:nvPr>
+        </p:nvSpPr>
+        <p:spPr>
+          <a:xfrm>
+            <a:off x="0" y="8685213"/>
+            <a:ext cx="2971800" cy="458787"/>
+          </a:xfrm>
+          <a:prstGeom prst="rect">
+            <a:avLst/>
+          </a:prstGeom>
+        </p:spPr>
+        <p:txBody>
+          <a:bodyPr vert="horz" lIns="91440" tIns="45720" rIns="91440" bIns="45720" rtlCol="0" anchor="b"/>
+          <a:lstStyle>
+            <a:lvl1pPr algn="l">
+              <a:defRPr sz="1200"/>
+            </a:lvl1pPr>
+          </a:lstStyle>
+          <a:p>
+            <a:endParaRPr lang="en-US"/>
+          </a:p>
+        </p:txBody>
+      </p:sp>
+      <p:sp>
+        <p:nvSpPr>
+          <p:cNvPr id="7" name="Slide Number Placeholder 6"/>
+          <p:cNvSpPr>
+            <a:spLocks noGrp="1"/>
+          </p:cNvSpPr>
+          <p:nvPr>
+            <p:ph type="sldNum" sz="quarter" idx="5"/>
+          </p:nvPr>
+        </p:nvSpPr>
+        <p:spPr>
+          <a:xfrm>
+            <a:off x="3884613" y="8685213"/>
+            <a:ext cx="2971800" cy="458787"/>
+          </a:xfrm>
+          <a:prstGeom prst="rect">
+            <a:avLst/>
+          </a:prstGeom>
+        </p:spPr>
+        <p:txBody>
+          <a:bodyPr vert="horz" lIns="91440" tIns="45720" rIns="91440" bIns="45720" rtlCol="0" anchor="b"/>
+          <a:lstStyle>
+            <a:lvl1pPr algn="r">
+              <a:defRPr sz="1200"/>
+            </a:lvl1pPr>
+          </a:lstStyle>
+          <a:p>
+            <a:fld id="{39DA97B9-FBCB-4246-9102-A06A7E8A9F5D}" type="slidenum">
+              <a:rPr lang="en-US" smtClean="0"/>
+              <a:t>‹#›</a:t>
+            </a:fld>
+            <a:endParaRPr lang="en-US"/>
+          </a:p>
+        </p:txBody>
+      </p:sp>
+    </p:spTree>
+    <p:extLst>
+      <p:ext uri="{BB962C8B-B14F-4D97-AF65-F5344CB8AC3E}">
+        <p14:creationId xmlns:p14="http://schemas.microsoft.com/office/powerpoint/2010/main" val="1979039460"/>
+      </p:ext>
+    </p:extLst>
+  </p:cSld>
+  <p:clrMap bg1="lt1" tx1="dk1" bg2="lt2" tx2="dk2" accent1="accent1" accent2="accent2" accent3="accent3" accent4="accent4" accent5="accent5" accent6="accent6" hlink="hlink" folHlink="folHlink"/>
+  <p:notesStyle>
+    <a:lvl1pPr marL="0" algn="l" defTabSz="914400" rtl="0" eaLnBrk="1" latinLnBrk="0" hangingPunct="1">
+      <a:defRPr sz="1200" kern="1200">
+        <a:solidFill>
+          <a:schemeClr val="tx1"/>
+        </a:solidFill>
+        <a:latin typeface="+mn-lt"/>
+        <a:ea typeface="+mn-ea"/>
+        <a:cs typeface="+mn-cs"/>
+      </a:defRPr>
+    </a:lvl1pPr>
+    <a:lvl2pPr marL="457200" algn="l" defTabSz="914400" rtl="0" eaLnBrk="1" latinLnBrk="0" hangingPunct="1">
+      <a:defRPr sz="1200" kern="1200">
+        <a:solidFill>
+          <a:schemeClr val="tx1"/>
+        </a:solidFill>
+        <a:latin typeface="+mn-lt"/>
+        <a:ea typeface="+mn-ea"/>
+        <a:cs typeface="+mn-cs"/>
+      </a:defRPr>
+    </a:lvl2pPr>
+    <a:lvl3pPr marL="914400" algn="l" defTabSz="914400" rtl="0" eaLnBrk="1" latinLnBrk="0" hangingPunct="1">
+      <a:defRPr sz="1200" kern="1200">
+        <a:solidFill>
+          <a:schemeClr val="tx1"/>
+        </a:solidFill>
+        <a:latin typeface="+mn-lt"/>
+        <a:ea typeface="+mn-ea"/>
+        <a:cs typeface="+mn-cs"/>
+      </a:defRPr>
+    </a:lvl3pPr>
+    <a:lvl4pPr marL="1371600" algn="l" defTabSz="914400" rtl="0" eaLnBrk="1" latinLnBrk="0" hangingPunct="1">
+      <a:defRPr sz="1200" kern="1200">
+        <a:solidFill>
+          <a:schemeClr val="tx1"/>
+        </a:solidFill>
+        <a:latin typeface="+mn-lt"/>
+        <a:ea typeface="+mn-ea"/>
+        <a:cs typeface="+mn-cs"/>
+      </a:defRPr>
+    </a:lvl4pPr>
+    <a:lvl5pPr marL="1828800" algn="l" defTabSz="914400" rtl="0" eaLnBrk="1" latinLnBrk="0" hangingPunct="1">
+      <a:defRPr sz="1200" kern="1200">
+        <a:solidFill>
+          <a:schemeClr val="tx1"/>
+        </a:solidFill>
+        <a:latin typeface="+mn-lt"/>
+        <a:ea typeface="+mn-ea"/>
+        <a:cs typeface="+mn-cs"/>
+      </a:defRPr>
+    </a:lvl5pPr>
+    <a:lvl6pPr marL="2286000" algn="l" defTabSz="914400" rtl="0" eaLnBrk="1" latinLnBrk="0" hangingPunct="1">
+      <a:defRPr sz="1200" kern="1200">
+        <a:solidFill>
+          <a:schemeClr val="tx1"/>
+        </a:solidFill>
+        <a:latin typeface="+mn-lt"/>
+        <a:ea typeface="+mn-ea"/>
+        <a:cs typeface="+mn-cs"/>
+      </a:defRPr>
+    </a:lvl6pPr>
+    <a:lvl7pPr marL="2743200" algn="l" defTabSz="914400" rtl="0" eaLnBrk="1" latinLnBrk="0" hangingPunct="1">
+      <a:defRPr sz="1200" kern="1200">
+        <a:solidFill>
+          <a:schemeClr val="tx1"/>
+        </a:solidFill>
+        <a:latin typeface="+mn-lt"/>
+        <a:ea typeface="+mn-ea"/>
+        <a:cs typeface="+mn-cs"/>
+      </a:defRPr>
+    </a:lvl7pPr>
+    <a:lvl8pPr marL="3200400" algn="l" defTabSz="914400" rtl="0" eaLnBrk="1" latinLnBrk="0" hangingPunct="1">
+      <a:defRPr sz="1200" kern="1200">
+        <a:solidFill>
+          <a:schemeClr val="tx1"/>
+        </a:solidFill>
+        <a:latin typeface="+mn-lt"/>
+        <a:ea typeface="+mn-ea"/>
+        <a:cs typeface="+mn-cs"/>
+      </a:defRPr>
+    </a:lvl8pPr>
+    <a:lvl9pPr marL="3657600" algn="l" defTabSz="914400" rtl="0" eaLnBrk="1" latinLnBrk="0" hangingPunct="1">
+      <a:defRPr sz="1200" kern="1200">
+        <a:solidFill>
+          <a:schemeClr val="tx1"/>
+        </a:solidFill>
+        <a:latin typeface="+mn-lt"/>
+        <a:ea typeface="+mn-ea"/>
+        <a:cs typeface="+mn-cs"/>
+      </a:defRPr>
+    </a:lvl9pPr>
+  </p:notesStyle>
+</p:notesMaster>
+</file>
+
+<file path=ppt/notesSlides/notesSlide1.xml><?xml version="1.0" encoding="utf-8"?>
+<p:notes xmlns:a="http://schemas.openxmlformats.org/drawingml/2006/main" xmlns:r="http://schemas.openxmlformats.org/officeDocument/2006/relationships" xmlns:p="http://schemas.openxmlformats.org/presentationml/2006/main">
+  <p:cSld>
+    <p:spTree>
+      <p:nvGrpSpPr>
+        <p:cNvPr id="1" name=""/>
+        <p:cNvGrpSpPr/>
+        <p:nvPr/>
+      </p:nvGrpSpPr>
+      <p:grpSpPr>
+        <a:xfrm>
+          <a:off x="0" y="0"/>
+          <a:ext cx="0" cy="0"/>
+          <a:chOff x="0" y="0"/>
+          <a:chExt cx="0" cy="0"/>
+        </a:xfrm>
+      </p:grpSpPr>
+      <p:sp>
+        <p:nvSpPr>
+          <p:cNvPr id="2" name="Slide Image Placeholder 1"/>
+          <p:cNvSpPr>
+            <a:spLocks noGrp="1" noRot="1" noChangeAspect="1"/>
+          </p:cNvSpPr>
+          <p:nvPr>
+            <p:ph type="sldImg"/>
+          </p:nvPr>
+        </p:nvSpPr>
+        <p:spPr/>
+      </p:sp>
+      <p:sp>
+        <p:nvSpPr>
+          <p:cNvPr id="3" name="Notes Placeholder 2"/>
+          <p:cNvSpPr>
+            <a:spLocks noGrp="1"/>
+          </p:cNvSpPr>
+          <p:nvPr>
+            <p:ph type="body" idx="1"/>
+          </p:nvPr>
+        </p:nvSpPr>
+        <p:spPr/>
+        <p:txBody>
+          <a:bodyPr/>
+          <a:lstStyle/>
+          <a:p>
+            <a:endParaRPr lang="en-US" dirty="0"/>
+          </a:p>
+        </p:txBody>
+      </p:sp>
+      <p:sp>
+        <p:nvSpPr>
+          <p:cNvPr id="4" name="Slide Number Placeholder 3"/>
+          <p:cNvSpPr>
+            <a:spLocks noGrp="1"/>
+          </p:cNvSpPr>
+          <p:nvPr>
+            <p:ph type="sldNum" sz="quarter" idx="5"/>
+          </p:nvPr>
+        </p:nvSpPr>
+        <p:spPr/>
+        <p:txBody>
+          <a:bodyPr/>
+          <a:lstStyle/>
+          <a:p>
+            <a:fld id="{39DA97B9-FBCB-4246-9102-A06A7E8A9F5D}" type="slidenum">
+              <a:rPr lang="en-US" smtClean="0"/>
+              <a:t>7</a:t>
+            </a:fld>
+            <a:endParaRPr lang="en-US"/>
+          </a:p>
+        </p:txBody>
+      </p:sp>
+    </p:spTree>
+    <p:extLst>
+      <p:ext uri="{BB962C8B-B14F-4D97-AF65-F5344CB8AC3E}">
+        <p14:creationId xmlns:p14="http://schemas.microsoft.com/office/powerpoint/2010/main" val="38654191"/>
+      </p:ext>
+    </p:extLst>
+  </p:cSld>
+  <p:clrMapOvr>
+    <a:masterClrMapping/>
+  </p:clrMapOvr>
+</p:notes>
+</file>
+
 <file path=ppt/slideLayouts/slideLayout1.xml><?xml version="1.0" encoding="utf-8"?>
 <p:sldLayout xmlns:a="http://schemas.openxmlformats.org/drawingml/2006/main" xmlns:r="http://schemas.openxmlformats.org/officeDocument/2006/relationships" xmlns:p="http://schemas.openxmlformats.org/presentationml/2006/main" type="title" preserve="1">
   <p:cSld name="Title Slide">
@@ -312,7 +749,7 @@
           <a:p>
             <a:fld id="{5BCAD085-E8A6-8845-BD4E-CB4CCA059FC4}" type="datetimeFigureOut">
               <a:rPr lang="en-US" smtClean="0"/>
-              <a:t>9/16/2026</a:t>
+              <a:t>9/18/2026</a:t>
             </a:fld>
             <a:endParaRPr lang="en-US"/>
           </a:p>
@@ -480,7 +917,7 @@
           <a:p>
             <a:fld id="{5BCAD085-E8A6-8845-BD4E-CB4CCA059FC4}" type="datetimeFigureOut">
               <a:rPr lang="en-US" smtClean="0"/>
-              <a:t>9/16/2026</a:t>
+              <a:t>9/18/2026</a:t>
             </a:fld>
             <a:endParaRPr lang="en-US"/>
           </a:p>
@@ -658,7 +1095,7 @@
           <a:p>
             <a:fld id="{5BCAD085-E8A6-8845-BD4E-CB4CCA059FC4}" type="datetimeFigureOut">
               <a:rPr lang="en-US" smtClean="0"/>
-              <a:t>9/16/2026</a:t>
+              <a:t>9/18/2026</a:t>
             </a:fld>
             <a:endParaRPr lang="en-US"/>
           </a:p>
@@ -826,7 +1263,7 @@
           <a:p>
             <a:fld id="{5BCAD085-E8A6-8845-BD4E-CB4CCA059FC4}" type="datetimeFigureOut">
               <a:rPr lang="en-US" smtClean="0"/>
-              <a:t>9/16/2026</a:t>
+              <a:t>9/18/2026</a:t>
             </a:fld>
             <a:endParaRPr lang="en-US"/>
           </a:p>
@@ -1071,7 +1508,7 @@
           <a:p>
             <a:fld id="{5BCAD085-E8A6-8845-BD4E-CB4CCA059FC4}" type="datetimeFigureOut">
               <a:rPr lang="en-US" smtClean="0"/>
-              <a:t>9/16/2026</a:t>
+              <a:t>9/18/2026</a:t>
             </a:fld>
             <a:endParaRPr lang="en-US"/>
           </a:p>
@@ -1356,7 +1793,7 @@
           <a:p>
             <a:fld id="{5BCAD085-E8A6-8845-BD4E-CB4CCA059FC4}" type="datetimeFigureOut">
               <a:rPr lang="en-US" smtClean="0"/>
-              <a:t>9/16/2026</a:t>
+              <a:t>9/18/2026</a:t>
             </a:fld>
             <a:endParaRPr lang="en-US"/>
           </a:p>
@@ -1775,7 +2212,7 @@
           <a:p>
             <a:fld id="{5BCAD085-E8A6-8845-BD4E-CB4CCA059FC4}" type="datetimeFigureOut">
               <a:rPr lang="en-US" smtClean="0"/>
-              <a:t>9/16/2026</a:t>
+              <a:t>9/18/2026</a:t>
             </a:fld>
             <a:endParaRPr lang="en-US"/>
           </a:p>
@@ -1892,7 +2329,7 @@
           <a:p>
             <a:fld id="{5BCAD085-E8A6-8845-BD4E-CB4CCA059FC4}" type="datetimeFigureOut">
               <a:rPr lang="en-US" smtClean="0"/>
-              <a:t>9/16/2026</a:t>
+              <a:t>9/18/2026</a:t>
             </a:fld>
             <a:endParaRPr lang="en-US"/>
           </a:p>
@@ -1987,7 +2424,7 @@
           <a:p>
             <a:fld id="{5BCAD085-E8A6-8845-BD4E-CB4CCA059FC4}" type="datetimeFigureOut">
               <a:rPr lang="en-US" smtClean="0"/>
-              <a:t>9/16/2026</a:t>
+              <a:t>9/18/2026</a:t>
             </a:fld>
             <a:endParaRPr lang="en-US"/>
           </a:p>
@@ -2262,7 +2699,7 @@
           <a:p>
             <a:fld id="{5BCAD085-E8A6-8845-BD4E-CB4CCA059FC4}" type="datetimeFigureOut">
               <a:rPr lang="en-US" smtClean="0"/>
-              <a:t>9/16/2026</a:t>
+              <a:t>9/18/2026</a:t>
             </a:fld>
             <a:endParaRPr lang="en-US"/>
           </a:p>
@@ -2514,7 +2951,7 @@
           <a:p>
             <a:fld id="{5BCAD085-E8A6-8845-BD4E-CB4CCA059FC4}" type="datetimeFigureOut">
               <a:rPr lang="en-US" smtClean="0"/>
-              <a:t>9/16/2026</a:t>
+              <a:t>9/18/2026</a:t>
             </a:fld>
             <a:endParaRPr lang="en-US"/>
           </a:p>
@@ -2725,7 +3162,7 @@
           <a:p>
             <a:fld id="{5BCAD085-E8A6-8845-BD4E-CB4CCA059FC4}" type="datetimeFigureOut">
               <a:rPr lang="en-US" smtClean="0"/>
-              <a:t>9/16/2026</a:t>
+              <a:t>9/18/2026</a:t>
             </a:fld>
             <a:endParaRPr lang="en-US"/>
           </a:p>
@@ -3358,14 +3795,6 @@
 <file path=ppt/slides/slide10.xml><?xml version="1.0" encoding="utf-8"?>
 <p:sld xmlns:a="http://schemas.openxmlformats.org/drawingml/2006/main" xmlns:r="http://schemas.openxmlformats.org/officeDocument/2006/relationships" xmlns:p="http://schemas.openxmlformats.org/presentationml/2006/main">
   <p:cSld>
-    <p:bg>
-      <p:bgPr>
-        <a:solidFill>
-          <a:srgbClr val="0B2A45"/>
-        </a:solidFill>
-        <a:effectLst/>
-      </p:bgPr>
-    </p:bg>
     <p:spTree>
       <p:nvGrpSpPr>
         <p:cNvPr id="1" name=""/>
@@ -3388,14 +3817,14 @@
         </p:nvSpPr>
         <p:spPr>
           <a:xfrm>
-            <a:off x="0" y="128016"/>
-            <a:ext cx="12191695" cy="27432"/>
+            <a:off x="0" y="0"/>
+            <a:ext cx="12191695" cy="128016"/>
           </a:xfrm>
           <a:prstGeom prst="rect">
             <a:avLst/>
           </a:prstGeom>
           <a:solidFill>
-            <a:srgbClr val="F0E442"/>
+            <a:srgbClr val="0072B2"/>
           </a:solidFill>
           <a:ln>
             <a:noFill/>
@@ -3433,7 +3862,7 @@
         </p:nvSpPr>
         <p:spPr>
           <a:xfrm>
-            <a:off x="548640" y="457200"/>
+            <a:off x="548640" y="320040"/>
             <a:ext cx="7315200" cy="365760"/>
           </a:xfrm>
           <a:prstGeom prst="rect">
@@ -3451,11 +3880,11 @@
             <a:r>
               <a:rPr sz="1400" b="1" i="0">
                 <a:solidFill>
-                  <a:srgbClr val="56B4E9"/>
-                </a:solidFill>
-                <a:latin typeface="Calibri"/>
-              </a:rPr>
-              <a:t>OUR RECOMMENDATION</a:t>
+                  <a:srgbClr val="0072B2"/>
+                </a:solidFill>
+                <a:latin typeface="Calibri"/>
+              </a:rPr>
+              <a:t>SUMMARY</a:t>
             </a:r>
           </a:p>
         </p:txBody>
@@ -3468,7 +3897,7 @@
         </p:nvSpPr>
         <p:spPr>
           <a:xfrm>
-            <a:off x="548640" y="777240"/>
+            <a:off x="548640" y="621792"/>
             <a:ext cx="10515600" cy="731520"/>
           </a:xfrm>
           <a:prstGeom prst="rect">
@@ -3486,31 +3915,80 @@
             <a:r>
               <a:rPr sz="3000" b="1" i="0">
                 <a:solidFill>
-                  <a:srgbClr val="FFFFFF"/>
-                </a:solidFill>
-                <a:latin typeface="Calibri"/>
-              </a:rPr>
-              <a:t>What we recommend for Thomas</a:t>
-            </a:r>
-          </a:p>
-        </p:txBody>
-      </p:sp>
-      <p:sp>
-        <p:nvSpPr>
-          <p:cNvPr id="5" name="Oval 4"/>
+                  <a:srgbClr val="0B2A45"/>
+                </a:solidFill>
+                <a:latin typeface="Calibri"/>
+              </a:rPr>
+              <a:t>Key insights</a:t>
+            </a:r>
+          </a:p>
+        </p:txBody>
+      </p:sp>
+      <p:sp>
+        <p:nvSpPr>
+          <p:cNvPr id="5" name="Rounded Rectangle 4"/>
           <p:cNvSpPr/>
           <p:nvPr/>
         </p:nvSpPr>
         <p:spPr>
           <a:xfrm>
-            <a:off x="548640" y="1691640"/>
-            <a:ext cx="548640" cy="548640"/>
+            <a:off x="548640" y="1737360"/>
+            <a:ext cx="11109960" cy="1463040"/>
+          </a:xfrm>
+          <a:prstGeom prst="roundRect">
+            <a:avLst>
+              <a:gd name="adj" fmla="val 10000"/>
+            </a:avLst>
+          </a:prstGeom>
+          <a:solidFill>
+            <a:srgbClr val="F4F6F9"/>
+          </a:solidFill>
+          <a:ln w="9525">
+            <a:solidFill>
+              <a:srgbClr val="DDE3EA"/>
+            </a:solidFill>
+          </a:ln>
+          <a:effectLst/>
+        </p:spPr>
+        <p:style>
+          <a:lnRef idx="1">
+            <a:schemeClr val="accent1"/>
+          </a:lnRef>
+          <a:fillRef idx="3">
+            <a:schemeClr val="accent1"/>
+          </a:fillRef>
+          <a:effectRef idx="2">
+            <a:schemeClr val="accent1"/>
+          </a:effectRef>
+          <a:fontRef idx="minor">
+            <a:schemeClr val="lt1"/>
+          </a:fontRef>
+        </p:style>
+        <p:txBody>
+          <a:bodyPr rtlCol="0" anchor="ctr"/>
+          <a:lstStyle/>
+          <a:p>
+            <a:pPr algn="ctr"/>
+            <a:endParaRPr/>
+          </a:p>
+        </p:txBody>
+      </p:sp>
+      <p:sp>
+        <p:nvSpPr>
+          <p:cNvPr id="6" name="Oval 5"/>
+          <p:cNvSpPr/>
+          <p:nvPr/>
+        </p:nvSpPr>
+        <p:spPr>
+          <a:xfrm>
+            <a:off x="868680" y="2057400"/>
+            <a:ext cx="822960" cy="822960"/>
           </a:xfrm>
           <a:prstGeom prst="ellipse">
             <a:avLst/>
           </a:prstGeom>
           <a:solidFill>
-            <a:srgbClr val="F0E442"/>
+            <a:srgbClr val="56B4E9"/>
           </a:solidFill>
           <a:ln>
             <a:noFill/>
@@ -3537,26 +4015,61 @@
           <a:p>
             <a:pPr algn="ctr"/>
             <a:r>
-              <a:rPr sz="2000" b="1">
+              <a:rPr sz="2600" b="1">
+                <a:solidFill>
+                  <a:srgbClr val="FFFFFF"/>
+                </a:solidFill>
+              </a:rPr>
+              <a:t>1</a:t>
+            </a:r>
+          </a:p>
+        </p:txBody>
+      </p:sp>
+      <p:sp>
+        <p:nvSpPr>
+          <p:cNvPr id="7" name="TextBox 6"/>
+          <p:cNvSpPr txBox="1"/>
+          <p:nvPr/>
+        </p:nvSpPr>
+        <p:spPr>
+          <a:xfrm>
+            <a:off x="1965960" y="1901952"/>
+            <a:ext cx="2926080" cy="365760"/>
+          </a:xfrm>
+          <a:prstGeom prst="rect">
+            <a:avLst/>
+          </a:prstGeom>
+          <a:noFill/>
+        </p:spPr>
+        <p:txBody>
+          <a:bodyPr wrap="square" anchor="t">
+            <a:spAutoFit/>
+          </a:bodyPr>
+          <a:lstStyle/>
+          <a:p>
+            <a:pPr algn="l"/>
+            <a:r>
+              <a:rPr sz="1700" b="1" i="0">
                 <a:solidFill>
                   <a:srgbClr val="0B2A45"/>
                 </a:solidFill>
-              </a:rPr>
-              <a:t>1</a:t>
-            </a:r>
-          </a:p>
-        </p:txBody>
-      </p:sp>
-      <p:sp>
-        <p:nvSpPr>
-          <p:cNvPr id="6" name="TextBox 5"/>
+                <a:latin typeface="Calibri"/>
+              </a:rPr>
+              <a:t>Feasibility</a:t>
+            </a:r>
+          </a:p>
+        </p:txBody>
+      </p:sp>
+      <p:sp>
+        <p:nvSpPr>
+          <p:cNvPr id="8" name="TextBox 7"/>
           <p:cNvSpPr txBox="1"/>
           <p:nvPr/>
         </p:nvSpPr>
         <p:spPr>
           <a:xfrm>
-            <a:off x="1371600" y="1673352"/>
-            <a:ext cx="10241280" cy="1005840"/>
+            <a:off x="1965960" y="2286000"/>
+            <a:ext cx="9418320" cy="822960"/>
           </a:xfrm>
           <a:prstGeom prst="rect">
             <a:avLst/>
@@ -3575,33 +4088,82 @@
               </a:lnSpc>
             </a:pPr>
             <a:r>
-              <a:rPr sz="1500" b="0" i="0">
-                <a:solidFill>
-                  <a:srgbClr val="FFFFFF"/>
-                </a:solidFill>
-                <a:latin typeface="Calibri"/>
-              </a:rPr>
-              <a:t>Start the search in zip code 98023 first — it offers the best mix of affordability, family-home availability, and community density.</a:t>
-            </a:r>
-          </a:p>
-        </p:txBody>
-      </p:sp>
-      <p:sp>
-        <p:nvSpPr>
-          <p:cNvPr id="7" name="Oval 6"/>
+              <a:rPr sz="1250" b="0" i="0">
+                <a:solidFill>
+                  <a:srgbClr val="222B33"/>
+                </a:solidFill>
+                <a:latin typeface="Calibri"/>
+              </a:rPr>
+              <a:t>Even on a strict budget, there are 1,227 homes with 4+ bedrooms available — a family of 7 is realistically housed in King County.</a:t>
+            </a:r>
+          </a:p>
+        </p:txBody>
+      </p:sp>
+      <p:sp>
+        <p:nvSpPr>
+          <p:cNvPr id="9" name="Rounded Rectangle 8"/>
           <p:cNvSpPr/>
           <p:nvPr/>
         </p:nvSpPr>
         <p:spPr>
           <a:xfrm>
-            <a:off x="548640" y="2834640"/>
-            <a:ext cx="548640" cy="548640"/>
+            <a:off x="548640" y="3429000"/>
+            <a:ext cx="11109960" cy="1463040"/>
+          </a:xfrm>
+          <a:prstGeom prst="roundRect">
+            <a:avLst>
+              <a:gd name="adj" fmla="val 10000"/>
+            </a:avLst>
+          </a:prstGeom>
+          <a:solidFill>
+            <a:srgbClr val="F4F6F9"/>
+          </a:solidFill>
+          <a:ln w="9525">
+            <a:solidFill>
+              <a:srgbClr val="DDE3EA"/>
+            </a:solidFill>
+          </a:ln>
+          <a:effectLst/>
+        </p:spPr>
+        <p:style>
+          <a:lnRef idx="1">
+            <a:schemeClr val="accent1"/>
+          </a:lnRef>
+          <a:fillRef idx="3">
+            <a:schemeClr val="accent1"/>
+          </a:fillRef>
+          <a:effectRef idx="2">
+            <a:schemeClr val="accent1"/>
+          </a:effectRef>
+          <a:fontRef idx="minor">
+            <a:schemeClr val="lt1"/>
+          </a:fontRef>
+        </p:style>
+        <p:txBody>
+          <a:bodyPr rtlCol="0" anchor="ctr"/>
+          <a:lstStyle/>
+          <a:p>
+            <a:pPr algn="ctr"/>
+            <a:endParaRPr/>
+          </a:p>
+        </p:txBody>
+      </p:sp>
+      <p:sp>
+        <p:nvSpPr>
+          <p:cNvPr id="10" name="Oval 9"/>
+          <p:cNvSpPr/>
+          <p:nvPr/>
+        </p:nvSpPr>
+        <p:spPr>
+          <a:xfrm>
+            <a:off x="868680" y="3749040"/>
+            <a:ext cx="822960" cy="822960"/>
           </a:xfrm>
           <a:prstGeom prst="ellipse">
             <a:avLst/>
           </a:prstGeom>
           <a:solidFill>
-            <a:srgbClr val="F0E442"/>
+            <a:srgbClr val="0072B2"/>
           </a:solidFill>
           <a:ln>
             <a:noFill/>
@@ -3628,26 +4190,61 @@
           <a:p>
             <a:pPr algn="ctr"/>
             <a:r>
-              <a:rPr sz="2000" b="1">
+              <a:rPr sz="2600" b="1">
+                <a:solidFill>
+                  <a:srgbClr val="FFFFFF"/>
+                </a:solidFill>
+              </a:rPr>
+              <a:t>2</a:t>
+            </a:r>
+          </a:p>
+        </p:txBody>
+      </p:sp>
+      <p:sp>
+        <p:nvSpPr>
+          <p:cNvPr id="11" name="TextBox 10"/>
+          <p:cNvSpPr txBox="1"/>
+          <p:nvPr/>
+        </p:nvSpPr>
+        <p:spPr>
+          <a:xfrm>
+            <a:off x="1965960" y="3593592"/>
+            <a:ext cx="2926080" cy="365760"/>
+          </a:xfrm>
+          <a:prstGeom prst="rect">
+            <a:avLst/>
+          </a:prstGeom>
+          <a:noFill/>
+        </p:spPr>
+        <p:txBody>
+          <a:bodyPr wrap="square" anchor="t">
+            <a:spAutoFit/>
+          </a:bodyPr>
+          <a:lstStyle/>
+          <a:p>
+            <a:pPr algn="l"/>
+            <a:r>
+              <a:rPr sz="1700" b="1" i="0">
                 <a:solidFill>
                   <a:srgbClr val="0B2A45"/>
                 </a:solidFill>
-              </a:rPr>
-              <a:t>2</a:t>
-            </a:r>
-          </a:p>
-        </p:txBody>
-      </p:sp>
-      <p:sp>
-        <p:nvSpPr>
-          <p:cNvPr id="8" name="TextBox 7"/>
+                <a:latin typeface="Calibri"/>
+              </a:rPr>
+              <a:t>Location</a:t>
+            </a:r>
+          </a:p>
+        </p:txBody>
+      </p:sp>
+      <p:sp>
+        <p:nvSpPr>
+          <p:cNvPr id="12" name="TextBox 11"/>
           <p:cNvSpPr txBox="1"/>
           <p:nvPr/>
         </p:nvSpPr>
         <p:spPr>
           <a:xfrm>
-            <a:off x="1371600" y="2816352"/>
-            <a:ext cx="10241280" cy="1005840"/>
+            <a:off x="1965960" y="3977640"/>
+            <a:ext cx="9418320" cy="769441"/>
           </a:xfrm>
           <a:prstGeom prst="rect">
             <a:avLst/>
@@ -3666,33 +4263,104 @@
               </a:lnSpc>
             </a:pPr>
             <a:r>
-              <a:rPr sz="1500" b="0" i="0">
-                <a:solidFill>
-                  <a:srgbClr val="FFFFFF"/>
-                </a:solidFill>
-                <a:latin typeface="Calibri"/>
-              </a:rPr>
-              <a:t>Keep zip code 98092 as a backup — slightly higher average build quality, but fewer homes on the market and a higher price.</a:t>
-            </a:r>
-          </a:p>
-        </p:txBody>
-      </p:sp>
-      <p:sp>
-        <p:nvSpPr>
-          <p:cNvPr id="9" name="Oval 8"/>
+              <a:rPr sz="1250" b="0" i="0" dirty="0">
+                <a:solidFill>
+                  <a:srgbClr val="222B33"/>
+                </a:solidFill>
+                <a:latin typeface="Calibri"/>
+              </a:rPr>
+              <a:t>Zip code 98023 stands out with the most affordable, family-sized homes of any neighborhood, at a price well under budget, with above-average condition and quality.</a:t>
+            </a:r>
+            <a:endParaRPr lang="en-US" sz="1250" b="0" i="0" dirty="0">
+              <a:solidFill>
+                <a:srgbClr val="222B33"/>
+              </a:solidFill>
+              <a:latin typeface="Calibri"/>
+            </a:endParaRPr>
+          </a:p>
+          <a:p>
+            <a:pPr algn="l">
+              <a:lnSpc>
+                <a:spcPct val="120000"/>
+              </a:lnSpc>
+            </a:pPr>
+            <a:r>
+              <a:rPr sz="1250" b="0" i="0" dirty="0">
+                <a:solidFill>
+                  <a:srgbClr val="222B33"/>
+                </a:solidFill>
+                <a:latin typeface="Calibri"/>
+              </a:rPr>
+              <a:t> 98092 is a strong backup.</a:t>
+            </a:r>
+          </a:p>
+        </p:txBody>
+      </p:sp>
+      <p:sp>
+        <p:nvSpPr>
+          <p:cNvPr id="13" name="Rounded Rectangle 12"/>
           <p:cNvSpPr/>
           <p:nvPr/>
         </p:nvSpPr>
         <p:spPr>
           <a:xfrm>
-            <a:off x="548640" y="3977640"/>
-            <a:ext cx="548640" cy="548640"/>
+            <a:off x="548640" y="5120640"/>
+            <a:ext cx="11109960" cy="1463040"/>
+          </a:xfrm>
+          <a:prstGeom prst="roundRect">
+            <a:avLst>
+              <a:gd name="adj" fmla="val 10000"/>
+            </a:avLst>
+          </a:prstGeom>
+          <a:solidFill>
+            <a:srgbClr val="F4F6F9"/>
+          </a:solidFill>
+          <a:ln w="9525">
+            <a:solidFill>
+              <a:srgbClr val="DDE3EA"/>
+            </a:solidFill>
+          </a:ln>
+          <a:effectLst/>
+        </p:spPr>
+        <p:style>
+          <a:lnRef idx="1">
+            <a:schemeClr val="accent1"/>
+          </a:lnRef>
+          <a:fillRef idx="3">
+            <a:schemeClr val="accent1"/>
+          </a:fillRef>
+          <a:effectRef idx="2">
+            <a:schemeClr val="accent1"/>
+          </a:effectRef>
+          <a:fontRef idx="minor">
+            <a:schemeClr val="lt1"/>
+          </a:fontRef>
+        </p:style>
+        <p:txBody>
+          <a:bodyPr rtlCol="0" anchor="ctr"/>
+          <a:lstStyle/>
+          <a:p>
+            <a:pPr algn="ctr"/>
+            <a:endParaRPr/>
+          </a:p>
+        </p:txBody>
+      </p:sp>
+      <p:sp>
+        <p:nvSpPr>
+          <p:cNvPr id="14" name="Oval 13"/>
+          <p:cNvSpPr/>
+          <p:nvPr/>
+        </p:nvSpPr>
+        <p:spPr>
+          <a:xfrm>
+            <a:off x="868680" y="5440680"/>
+            <a:ext cx="822960" cy="822960"/>
           </a:xfrm>
           <a:prstGeom prst="ellipse">
             <a:avLst/>
           </a:prstGeom>
           <a:solidFill>
-            <a:srgbClr val="F0E442"/>
+            <a:srgbClr val="0B2A45"/>
           </a:solidFill>
           <a:ln>
             <a:noFill/>
@@ -3719,26 +4387,61 @@
           <a:p>
             <a:pPr algn="ctr"/>
             <a:r>
-              <a:rPr sz="2000" b="1">
+              <a:rPr sz="2600" b="1">
+                <a:solidFill>
+                  <a:srgbClr val="FFFFFF"/>
+                </a:solidFill>
+              </a:rPr>
+              <a:t>3</a:t>
+            </a:r>
+          </a:p>
+        </p:txBody>
+      </p:sp>
+      <p:sp>
+        <p:nvSpPr>
+          <p:cNvPr id="15" name="TextBox 14"/>
+          <p:cNvSpPr txBox="1"/>
+          <p:nvPr/>
+        </p:nvSpPr>
+        <p:spPr>
+          <a:xfrm>
+            <a:off x="1965960" y="5285232"/>
+            <a:ext cx="2926080" cy="365760"/>
+          </a:xfrm>
+          <a:prstGeom prst="rect">
+            <a:avLst/>
+          </a:prstGeom>
+          <a:noFill/>
+        </p:spPr>
+        <p:txBody>
+          <a:bodyPr wrap="square" anchor="t">
+            <a:spAutoFit/>
+          </a:bodyPr>
+          <a:lstStyle/>
+          <a:p>
+            <a:pPr algn="l"/>
+            <a:r>
+              <a:rPr sz="1700" b="1" i="0">
                 <a:solidFill>
                   <a:srgbClr val="0B2A45"/>
                 </a:solidFill>
-              </a:rPr>
-              <a:t>3</a:t>
-            </a:r>
-          </a:p>
-        </p:txBody>
-      </p:sp>
-      <p:sp>
-        <p:nvSpPr>
-          <p:cNvPr id="10" name="TextBox 9"/>
+                <a:latin typeface="Calibri"/>
+              </a:rPr>
+              <a:t>Timing</a:t>
+            </a:r>
+          </a:p>
+        </p:txBody>
+      </p:sp>
+      <p:sp>
+        <p:nvSpPr>
+          <p:cNvPr id="16" name="TextBox 15"/>
           <p:cNvSpPr txBox="1"/>
           <p:nvPr/>
         </p:nvSpPr>
         <p:spPr>
           <a:xfrm>
-            <a:off x="1371600" y="3959352"/>
-            <a:ext cx="10241280" cy="1005840"/>
+            <a:off x="1965960" y="5669280"/>
+            <a:ext cx="9418320" cy="538609"/>
           </a:xfrm>
           <a:prstGeom prst="rect">
             <a:avLst/>
@@ -3757,90 +4460,21 @@
               </a:lnSpc>
             </a:pPr>
             <a:r>
-              <a:rPr sz="1500" b="0" i="0">
-                <a:solidFill>
-                  <a:srgbClr val="FFFFFF"/>
-                </a:solidFill>
-                <a:latin typeface="Calibri"/>
-              </a:rPr>
-              <a:t>Don't over-optimize for timing — the ~8% seasonal swing is small next to the difference between neighborhoods. Let location drive the decision.</a:t>
-            </a:r>
-          </a:p>
-        </p:txBody>
-      </p:sp>
-      <p:sp>
-        <p:nvSpPr>
-          <p:cNvPr id="11" name="Oval 10"/>
-          <p:cNvSpPr/>
-          <p:nvPr/>
-        </p:nvSpPr>
-        <p:spPr>
-          <a:xfrm>
-            <a:off x="548640" y="5120640"/>
-            <a:ext cx="548640" cy="548640"/>
-          </a:xfrm>
-          <a:prstGeom prst="ellipse">
-            <a:avLst/>
-          </a:prstGeom>
-          <a:solidFill>
-            <a:srgbClr val="F0E442"/>
-          </a:solidFill>
-          <a:ln>
-            <a:noFill/>
-          </a:ln>
-          <a:effectLst/>
-        </p:spPr>
-        <p:style>
-          <a:lnRef idx="1">
-            <a:schemeClr val="accent1"/>
-          </a:lnRef>
-          <a:fillRef idx="3">
-            <a:schemeClr val="accent1"/>
-          </a:fillRef>
-          <a:effectRef idx="2">
-            <a:schemeClr val="accent1"/>
-          </a:effectRef>
-          <a:fontRef idx="minor">
-            <a:schemeClr val="lt1"/>
-          </a:fontRef>
-        </p:style>
-        <p:txBody>
-          <a:bodyPr wrap="square" rtlCol="0" anchor="ctr"/>
-          <a:lstStyle/>
-          <a:p>
-            <a:pPr algn="ctr"/>
-            <a:r>
-              <a:rPr sz="2000" b="1">
-                <a:solidFill>
-                  <a:srgbClr val="0B2A45"/>
-                </a:solidFill>
-              </a:rPr>
-              <a:t>4</a:t>
-            </a:r>
-          </a:p>
-        </p:txBody>
-      </p:sp>
-      <p:sp>
-        <p:nvSpPr>
-          <p:cNvPr id="12" name="TextBox 11"/>
-          <p:cNvSpPr txBox="1"/>
-          <p:nvPr/>
-        </p:nvSpPr>
-        <p:spPr>
-          <a:xfrm>
-            <a:off x="1371600" y="5102352"/>
-            <a:ext cx="10241280" cy="1005840"/>
-          </a:xfrm>
-          <a:prstGeom prst="rect">
-            <a:avLst/>
-          </a:prstGeom>
-          <a:noFill/>
-        </p:spPr>
-        <p:txBody>
-          <a:bodyPr wrap="square" anchor="t">
-            <a:spAutoFit/>
-          </a:bodyPr>
-          <a:lstStyle/>
+              <a:rPr sz="1250" b="0" i="0" dirty="0">
+                <a:solidFill>
+                  <a:srgbClr val="222B33"/>
+                </a:solidFill>
+                <a:latin typeface="Calibri"/>
+              </a:rPr>
+              <a:t>The ~8% swing is a county-wide average — 98023 and 98092 actually move 15–17% individually. </a:t>
+            </a:r>
+            <a:endParaRPr lang="en-US" sz="1250" b="0" i="0" dirty="0">
+              <a:solidFill>
+                <a:srgbClr val="222B33"/>
+              </a:solidFill>
+              <a:latin typeface="Calibri"/>
+            </a:endParaRPr>
+          </a:p>
           <a:p>
             <a:pPr algn="l">
               <a:lnSpc>
@@ -3848,20 +4482,20 @@
               </a:lnSpc>
             </a:pPr>
             <a:r>
-              <a:rPr sz="1500" b="0" i="0">
-                <a:solidFill>
-                  <a:srgbClr val="FFFFFF"/>
-                </a:solidFill>
-                <a:latin typeface="Calibri"/>
-              </a:rPr>
-              <a:t>If he can stay flexible, aim to close toward the end of the year (around December) for a modest additional discount.</a:t>
-            </a:r>
-          </a:p>
-        </p:txBody>
-      </p:sp>
-      <p:sp>
-        <p:nvSpPr>
-          <p:cNvPr id="13" name="TextBox 12"/>
+              <a:rPr sz="1250" b="0" i="0" dirty="0">
+                <a:solidFill>
+                  <a:srgbClr val="222B33"/>
+                </a:solidFill>
+                <a:latin typeface="Calibri"/>
+              </a:rPr>
+              <a:t>Location, not the calendar, should still drive the decision.</a:t>
+            </a:r>
+          </a:p>
+        </p:txBody>
+      </p:sp>
+      <p:sp>
+        <p:nvSpPr>
+          <p:cNvPr id="17" name="TextBox 16"/>
           <p:cNvSpPr txBox="1"/>
           <p:nvPr/>
         </p:nvSpPr>
@@ -3935,6 +4569,647 @@
         </p:nvSpPr>
         <p:spPr>
           <a:xfrm>
+            <a:off x="0" y="128016"/>
+            <a:ext cx="12191695" cy="27432"/>
+          </a:xfrm>
+          <a:prstGeom prst="rect">
+            <a:avLst/>
+          </a:prstGeom>
+          <a:solidFill>
+            <a:srgbClr val="F0E442"/>
+          </a:solidFill>
+          <a:ln>
+            <a:noFill/>
+          </a:ln>
+          <a:effectLst/>
+        </p:spPr>
+        <p:style>
+          <a:lnRef idx="1">
+            <a:schemeClr val="accent1"/>
+          </a:lnRef>
+          <a:fillRef idx="3">
+            <a:schemeClr val="accent1"/>
+          </a:fillRef>
+          <a:effectRef idx="2">
+            <a:schemeClr val="accent1"/>
+          </a:effectRef>
+          <a:fontRef idx="minor">
+            <a:schemeClr val="lt1"/>
+          </a:fontRef>
+        </p:style>
+        <p:txBody>
+          <a:bodyPr rtlCol="0" anchor="ctr"/>
+          <a:lstStyle/>
+          <a:p>
+            <a:pPr algn="ctr"/>
+            <a:endParaRPr/>
+          </a:p>
+        </p:txBody>
+      </p:sp>
+      <p:sp>
+        <p:nvSpPr>
+          <p:cNvPr id="3" name="TextBox 2"/>
+          <p:cNvSpPr txBox="1"/>
+          <p:nvPr/>
+        </p:nvSpPr>
+        <p:spPr>
+          <a:xfrm>
+            <a:off x="548640" y="457200"/>
+            <a:ext cx="7315200" cy="365760"/>
+          </a:xfrm>
+          <a:prstGeom prst="rect">
+            <a:avLst/>
+          </a:prstGeom>
+          <a:noFill/>
+        </p:spPr>
+        <p:txBody>
+          <a:bodyPr wrap="square" anchor="t">
+            <a:spAutoFit/>
+          </a:bodyPr>
+          <a:lstStyle/>
+          <a:p>
+            <a:pPr algn="l"/>
+            <a:r>
+              <a:rPr sz="1400" b="1" i="0">
+                <a:solidFill>
+                  <a:srgbClr val="56B4E9"/>
+                </a:solidFill>
+                <a:latin typeface="Calibri"/>
+              </a:rPr>
+              <a:t>OUR RECOMMENDATION</a:t>
+            </a:r>
+          </a:p>
+        </p:txBody>
+      </p:sp>
+      <p:sp>
+        <p:nvSpPr>
+          <p:cNvPr id="4" name="TextBox 3"/>
+          <p:cNvSpPr txBox="1"/>
+          <p:nvPr/>
+        </p:nvSpPr>
+        <p:spPr>
+          <a:xfrm>
+            <a:off x="548640" y="777240"/>
+            <a:ext cx="10515600" cy="731520"/>
+          </a:xfrm>
+          <a:prstGeom prst="rect">
+            <a:avLst/>
+          </a:prstGeom>
+          <a:noFill/>
+        </p:spPr>
+        <p:txBody>
+          <a:bodyPr wrap="square" anchor="t">
+            <a:spAutoFit/>
+          </a:bodyPr>
+          <a:lstStyle/>
+          <a:p>
+            <a:pPr algn="l"/>
+            <a:r>
+              <a:rPr sz="3000" b="1" i="0">
+                <a:solidFill>
+                  <a:srgbClr val="FFFFFF"/>
+                </a:solidFill>
+                <a:latin typeface="Calibri"/>
+              </a:rPr>
+              <a:t>What we recommend for Thomas</a:t>
+            </a:r>
+          </a:p>
+        </p:txBody>
+      </p:sp>
+      <p:sp>
+        <p:nvSpPr>
+          <p:cNvPr id="5" name="Oval 4"/>
+          <p:cNvSpPr/>
+          <p:nvPr/>
+        </p:nvSpPr>
+        <p:spPr>
+          <a:xfrm>
+            <a:off x="548640" y="1691640"/>
+            <a:ext cx="548640" cy="548640"/>
+          </a:xfrm>
+          <a:prstGeom prst="ellipse">
+            <a:avLst/>
+          </a:prstGeom>
+          <a:solidFill>
+            <a:srgbClr val="F0E442"/>
+          </a:solidFill>
+          <a:ln>
+            <a:noFill/>
+          </a:ln>
+          <a:effectLst/>
+        </p:spPr>
+        <p:style>
+          <a:lnRef idx="1">
+            <a:schemeClr val="accent1"/>
+          </a:lnRef>
+          <a:fillRef idx="3">
+            <a:schemeClr val="accent1"/>
+          </a:fillRef>
+          <a:effectRef idx="2">
+            <a:schemeClr val="accent1"/>
+          </a:effectRef>
+          <a:fontRef idx="minor">
+            <a:schemeClr val="lt1"/>
+          </a:fontRef>
+        </p:style>
+        <p:txBody>
+          <a:bodyPr wrap="square" rtlCol="0" anchor="ctr"/>
+          <a:lstStyle/>
+          <a:p>
+            <a:pPr algn="ctr"/>
+            <a:r>
+              <a:rPr sz="2000" b="1">
+                <a:solidFill>
+                  <a:srgbClr val="0B2A45"/>
+                </a:solidFill>
+              </a:rPr>
+              <a:t>1</a:t>
+            </a:r>
+          </a:p>
+        </p:txBody>
+      </p:sp>
+      <p:sp>
+        <p:nvSpPr>
+          <p:cNvPr id="6" name="TextBox 5"/>
+          <p:cNvSpPr txBox="1"/>
+          <p:nvPr/>
+        </p:nvSpPr>
+        <p:spPr>
+          <a:xfrm>
+            <a:off x="1371600" y="1673352"/>
+            <a:ext cx="10241280" cy="350865"/>
+          </a:xfrm>
+          <a:prstGeom prst="rect">
+            <a:avLst/>
+          </a:prstGeom>
+          <a:noFill/>
+        </p:spPr>
+        <p:txBody>
+          <a:bodyPr wrap="square" anchor="t">
+            <a:spAutoFit/>
+          </a:bodyPr>
+          <a:lstStyle/>
+          <a:p>
+            <a:pPr>
+              <a:lnSpc>
+                <a:spcPct val="120000"/>
+              </a:lnSpc>
+            </a:pPr>
+            <a:r>
+              <a:rPr lang="en-US" sz="1500" dirty="0">
+                <a:solidFill>
+                  <a:srgbClr val="FFFFFF"/>
+                </a:solidFill>
+              </a:rPr>
+              <a:t>Start the search in zip code 98023 first — it offers the best mix of affordability, family-home availability, and community density</a:t>
+            </a:r>
+            <a:r>
+              <a:rPr sz="1500" b="0" i="0" dirty="0">
+                <a:solidFill>
+                  <a:srgbClr val="FFFFFF"/>
+                </a:solidFill>
+                <a:latin typeface="Calibri"/>
+              </a:rPr>
+              <a:t>.</a:t>
+            </a:r>
+          </a:p>
+        </p:txBody>
+      </p:sp>
+      <p:sp>
+        <p:nvSpPr>
+          <p:cNvPr id="7" name="Oval 6"/>
+          <p:cNvSpPr/>
+          <p:nvPr/>
+        </p:nvSpPr>
+        <p:spPr>
+          <a:xfrm>
+            <a:off x="548640" y="2834640"/>
+            <a:ext cx="548640" cy="548640"/>
+          </a:xfrm>
+          <a:prstGeom prst="ellipse">
+            <a:avLst/>
+          </a:prstGeom>
+          <a:solidFill>
+            <a:srgbClr val="F0E442"/>
+          </a:solidFill>
+          <a:ln>
+            <a:noFill/>
+          </a:ln>
+          <a:effectLst/>
+        </p:spPr>
+        <p:style>
+          <a:lnRef idx="1">
+            <a:schemeClr val="accent1"/>
+          </a:lnRef>
+          <a:fillRef idx="3">
+            <a:schemeClr val="accent1"/>
+          </a:fillRef>
+          <a:effectRef idx="2">
+            <a:schemeClr val="accent1"/>
+          </a:effectRef>
+          <a:fontRef idx="minor">
+            <a:schemeClr val="lt1"/>
+          </a:fontRef>
+        </p:style>
+        <p:txBody>
+          <a:bodyPr wrap="square" rtlCol="0" anchor="ctr"/>
+          <a:lstStyle/>
+          <a:p>
+            <a:pPr algn="ctr"/>
+            <a:r>
+              <a:rPr sz="2000" b="1">
+                <a:solidFill>
+                  <a:srgbClr val="0B2A45"/>
+                </a:solidFill>
+              </a:rPr>
+              <a:t>2</a:t>
+            </a:r>
+          </a:p>
+        </p:txBody>
+      </p:sp>
+      <p:sp>
+        <p:nvSpPr>
+          <p:cNvPr id="8" name="TextBox 7"/>
+          <p:cNvSpPr txBox="1"/>
+          <p:nvPr/>
+        </p:nvSpPr>
+        <p:spPr>
+          <a:xfrm>
+            <a:off x="1371600" y="2816352"/>
+            <a:ext cx="10241280" cy="350865"/>
+          </a:xfrm>
+          <a:prstGeom prst="rect">
+            <a:avLst/>
+          </a:prstGeom>
+          <a:noFill/>
+        </p:spPr>
+        <p:txBody>
+          <a:bodyPr wrap="square" anchor="t">
+            <a:spAutoFit/>
+          </a:bodyPr>
+          <a:lstStyle/>
+          <a:p>
+            <a:pPr>
+              <a:lnSpc>
+                <a:spcPct val="120000"/>
+              </a:lnSpc>
+            </a:pPr>
+            <a:r>
+              <a:rPr lang="en-US" sz="1500" dirty="0">
+                <a:solidFill>
+                  <a:srgbClr val="FFFFFF"/>
+                </a:solidFill>
+              </a:rPr>
+              <a:t>Keep zip code 98092 as a backup — slightly higher average build quality, but fewer homes on the market and a higher price</a:t>
+            </a:r>
+            <a:r>
+              <a:rPr sz="1500" b="0" i="0" dirty="0">
+                <a:solidFill>
+                  <a:srgbClr val="FFFFFF"/>
+                </a:solidFill>
+                <a:latin typeface="Calibri"/>
+              </a:rPr>
+              <a:t>.</a:t>
+            </a:r>
+          </a:p>
+        </p:txBody>
+      </p:sp>
+      <p:sp>
+        <p:nvSpPr>
+          <p:cNvPr id="9" name="Oval 8"/>
+          <p:cNvSpPr/>
+          <p:nvPr/>
+        </p:nvSpPr>
+        <p:spPr>
+          <a:xfrm>
+            <a:off x="548640" y="3977640"/>
+            <a:ext cx="548640" cy="548640"/>
+          </a:xfrm>
+          <a:prstGeom prst="ellipse">
+            <a:avLst/>
+          </a:prstGeom>
+          <a:solidFill>
+            <a:srgbClr val="F0E442"/>
+          </a:solidFill>
+          <a:ln>
+            <a:noFill/>
+          </a:ln>
+          <a:effectLst/>
+        </p:spPr>
+        <p:style>
+          <a:lnRef idx="1">
+            <a:schemeClr val="accent1"/>
+          </a:lnRef>
+          <a:fillRef idx="3">
+            <a:schemeClr val="accent1"/>
+          </a:fillRef>
+          <a:effectRef idx="2">
+            <a:schemeClr val="accent1"/>
+          </a:effectRef>
+          <a:fontRef idx="minor">
+            <a:schemeClr val="lt1"/>
+          </a:fontRef>
+        </p:style>
+        <p:txBody>
+          <a:bodyPr wrap="square" rtlCol="0" anchor="ctr"/>
+          <a:lstStyle/>
+          <a:p>
+            <a:pPr algn="ctr"/>
+            <a:r>
+              <a:rPr sz="2000" b="1">
+                <a:solidFill>
+                  <a:srgbClr val="0B2A45"/>
+                </a:solidFill>
+              </a:rPr>
+              <a:t>3</a:t>
+            </a:r>
+          </a:p>
+        </p:txBody>
+      </p:sp>
+      <p:sp>
+        <p:nvSpPr>
+          <p:cNvPr id="10" name="TextBox 9"/>
+          <p:cNvSpPr txBox="1"/>
+          <p:nvPr/>
+        </p:nvSpPr>
+        <p:spPr>
+          <a:xfrm>
+            <a:off x="1371600" y="3835527"/>
+            <a:ext cx="10241280" cy="904863"/>
+          </a:xfrm>
+          <a:prstGeom prst="rect">
+            <a:avLst/>
+          </a:prstGeom>
+          <a:noFill/>
+        </p:spPr>
+        <p:txBody>
+          <a:bodyPr wrap="square" anchor="t">
+            <a:spAutoFit/>
+          </a:bodyPr>
+          <a:lstStyle/>
+          <a:p>
+            <a:pPr>
+              <a:lnSpc>
+                <a:spcPct val="120000"/>
+              </a:lnSpc>
+            </a:pPr>
+            <a:r>
+              <a:rPr lang="en-US" sz="1500" dirty="0">
+                <a:solidFill>
+                  <a:srgbClr val="FFFFFF"/>
+                </a:solidFill>
+              </a:rPr>
+              <a:t>Don't over-optimize for timing — within either </a:t>
+            </a:r>
+            <a:r>
+              <a:rPr lang="en-US" sz="1500" dirty="0" err="1">
+                <a:solidFill>
+                  <a:srgbClr val="FFFFFF"/>
+                </a:solidFill>
+              </a:rPr>
+              <a:t>zipcode</a:t>
+            </a:r>
+            <a:r>
+              <a:rPr lang="en-US" sz="1500" dirty="0">
+                <a:solidFill>
+                  <a:srgbClr val="FFFFFF"/>
+                </a:solidFill>
+              </a:rPr>
+              <a:t>, month-to-month swings (15–17%) are still smaller than what separates a home that fits his needs from one that doesn’t. </a:t>
+            </a:r>
+          </a:p>
+          <a:p>
+            <a:pPr>
+              <a:lnSpc>
+                <a:spcPct val="120000"/>
+              </a:lnSpc>
+            </a:pPr>
+            <a:r>
+              <a:rPr lang="en-US" sz="1500" dirty="0">
+                <a:solidFill>
+                  <a:srgbClr val="FFFFFF"/>
+                </a:solidFill>
+              </a:rPr>
+              <a:t>Let location drive the decision</a:t>
+            </a:r>
+            <a:r>
+              <a:rPr sz="1500" b="0" i="0" dirty="0">
+                <a:solidFill>
+                  <a:srgbClr val="FFFFFF"/>
+                </a:solidFill>
+                <a:latin typeface="Calibri"/>
+              </a:rPr>
+              <a:t>.</a:t>
+            </a:r>
+          </a:p>
+        </p:txBody>
+      </p:sp>
+      <p:sp>
+        <p:nvSpPr>
+          <p:cNvPr id="11" name="Oval 10"/>
+          <p:cNvSpPr/>
+          <p:nvPr/>
+        </p:nvSpPr>
+        <p:spPr>
+          <a:xfrm>
+            <a:off x="548640" y="5120640"/>
+            <a:ext cx="548640" cy="548640"/>
+          </a:xfrm>
+          <a:prstGeom prst="ellipse">
+            <a:avLst/>
+          </a:prstGeom>
+          <a:solidFill>
+            <a:srgbClr val="F0E442"/>
+          </a:solidFill>
+          <a:ln>
+            <a:noFill/>
+          </a:ln>
+          <a:effectLst/>
+        </p:spPr>
+        <p:style>
+          <a:lnRef idx="1">
+            <a:schemeClr val="accent1"/>
+          </a:lnRef>
+          <a:fillRef idx="3">
+            <a:schemeClr val="accent1"/>
+          </a:fillRef>
+          <a:effectRef idx="2">
+            <a:schemeClr val="accent1"/>
+          </a:effectRef>
+          <a:fontRef idx="minor">
+            <a:schemeClr val="lt1"/>
+          </a:fontRef>
+        </p:style>
+        <p:txBody>
+          <a:bodyPr wrap="square" rtlCol="0" anchor="ctr"/>
+          <a:lstStyle/>
+          <a:p>
+            <a:pPr algn="ctr"/>
+            <a:r>
+              <a:rPr sz="2000" b="1">
+                <a:solidFill>
+                  <a:srgbClr val="0B2A45"/>
+                </a:solidFill>
+              </a:rPr>
+              <a:t>4</a:t>
+            </a:r>
+          </a:p>
+        </p:txBody>
+      </p:sp>
+      <p:sp>
+        <p:nvSpPr>
+          <p:cNvPr id="12" name="TextBox 11"/>
+          <p:cNvSpPr txBox="1"/>
+          <p:nvPr/>
+        </p:nvSpPr>
+        <p:spPr>
+          <a:xfrm>
+            <a:off x="1371600" y="5102352"/>
+            <a:ext cx="10241280" cy="627864"/>
+          </a:xfrm>
+          <a:prstGeom prst="rect">
+            <a:avLst/>
+          </a:prstGeom>
+          <a:noFill/>
+        </p:spPr>
+        <p:txBody>
+          <a:bodyPr wrap="square" anchor="t">
+            <a:spAutoFit/>
+          </a:bodyPr>
+          <a:lstStyle/>
+          <a:p>
+            <a:pPr>
+              <a:lnSpc>
+                <a:spcPct val="120000"/>
+              </a:lnSpc>
+            </a:pPr>
+            <a:r>
+              <a:rPr lang="en-US" sz="1500" dirty="0">
+                <a:solidFill>
+                  <a:srgbClr val="FFFFFF"/>
+                </a:solidFill>
+              </a:rPr>
+              <a:t>If flexible on timing, use the </a:t>
+            </a:r>
+            <a:r>
+              <a:rPr lang="en-US" sz="1500" dirty="0" err="1">
+                <a:solidFill>
+                  <a:srgbClr val="FFFFFF"/>
+                </a:solidFill>
+              </a:rPr>
+              <a:t>zipcode</a:t>
+            </a:r>
+            <a:r>
+              <a:rPr lang="en-US" sz="1500" dirty="0">
+                <a:solidFill>
+                  <a:srgbClr val="FFFFFF"/>
+                </a:solidFill>
+              </a:rPr>
+              <a:t>-specific pattern, not the countywide one: </a:t>
+            </a:r>
+          </a:p>
+          <a:p>
+            <a:pPr>
+              <a:lnSpc>
+                <a:spcPct val="120000"/>
+              </a:lnSpc>
+            </a:pPr>
+            <a:r>
+              <a:rPr lang="en-US" sz="1500" dirty="0">
+                <a:solidFill>
+                  <a:srgbClr val="FFFFFF"/>
+                </a:solidFill>
+              </a:rPr>
+              <a:t>prices tend to be lowest around June in 98023, and around May in 98092 — not December</a:t>
+            </a:r>
+            <a:r>
+              <a:rPr sz="1500" b="0" i="0" dirty="0">
+                <a:solidFill>
+                  <a:srgbClr val="FFFFFF"/>
+                </a:solidFill>
+                <a:latin typeface="Calibri"/>
+              </a:rPr>
+              <a:t>.</a:t>
+            </a:r>
+          </a:p>
+        </p:txBody>
+      </p:sp>
+      <p:sp>
+        <p:nvSpPr>
+          <p:cNvPr id="13" name="TextBox 12"/>
+          <p:cNvSpPr txBox="1"/>
+          <p:nvPr/>
+        </p:nvSpPr>
+        <p:spPr>
+          <a:xfrm>
+            <a:off x="11277295" y="6355080"/>
+            <a:ext cx="640080" cy="365760"/>
+          </a:xfrm>
+          <a:prstGeom prst="rect">
+            <a:avLst/>
+          </a:prstGeom>
+          <a:noFill/>
+        </p:spPr>
+        <p:txBody>
+          <a:bodyPr wrap="square" anchor="t">
+            <a:spAutoFit/>
+          </a:bodyPr>
+          <a:lstStyle/>
+          <a:p>
+            <a:pPr algn="r"/>
+            <a:r>
+              <a:rPr sz="1200" b="0" i="0">
+                <a:solidFill>
+                  <a:srgbClr val="555F6B"/>
+                </a:solidFill>
+                <a:latin typeface="Calibri"/>
+              </a:rPr>
+              <a:t>10</a:t>
+            </a:r>
+          </a:p>
+        </p:txBody>
+      </p:sp>
+    </p:spTree>
+  </p:cSld>
+  <p:clrMapOvr>
+    <a:masterClrMapping/>
+  </p:clrMapOvr>
+</p:sld>
+</file>
+
+<file path=ppt/slides/slide12.xml><?xml version="1.0" encoding="utf-8"?>
+<p:sld xmlns:a="http://schemas.openxmlformats.org/drawingml/2006/main" xmlns:r="http://schemas.openxmlformats.org/officeDocument/2006/relationships" xmlns:p="http://schemas.openxmlformats.org/presentationml/2006/main">
+  <p:cSld>
+    <p:bg>
+      <p:bgPr>
+        <a:solidFill>
+          <a:srgbClr val="0B2A45"/>
+        </a:solidFill>
+        <a:effectLst/>
+      </p:bgPr>
+    </p:bg>
+    <p:spTree>
+      <p:nvGrpSpPr>
+        <p:cNvPr id="1" name=""/>
+        <p:cNvGrpSpPr/>
+        <p:nvPr/>
+      </p:nvGrpSpPr>
+      <p:grpSpPr>
+        <a:xfrm>
+          <a:off x="0" y="0"/>
+          <a:ext cx="0" cy="0"/>
+          <a:chOff x="0" y="0"/>
+          <a:chExt cx="0" cy="0"/>
+        </a:xfrm>
+      </p:grpSpPr>
+      <p:sp>
+        <p:nvSpPr>
+          <p:cNvPr id="2" name="Rectangle 1"/>
+          <p:cNvSpPr/>
+          <p:nvPr/>
+        </p:nvSpPr>
+        <p:spPr>
+          <a:xfrm>
             <a:off x="0" y="5989320"/>
             <a:ext cx="12191695" cy="109728"/>
           </a:xfrm>
@@ -5383,8 +6658,8 @@
         </p:nvSpPr>
         <p:spPr>
           <a:xfrm>
-            <a:off x="5989320" y="2122958"/>
-            <a:ext cx="5623560" cy="3406571"/>
+            <a:off x="6492240" y="2122958"/>
+            <a:ext cx="4572000" cy="3406571"/>
           </a:xfrm>
           <a:prstGeom prst="roundRect">
             <a:avLst>
@@ -5420,10 +6695,6 @@
           <a:lstStyle/>
           <a:p>
             <a:pPr algn="ctr"/>
-            <a:r>
-              <a:rPr lang="en-US" dirty="0"/>
-              <a:t>8</a:t>
-            </a:r>
             <a:endParaRPr dirty="0"/>
           </a:p>
         </p:txBody>
@@ -5436,8 +6707,8 @@
         </p:nvSpPr>
         <p:spPr>
           <a:xfrm>
-            <a:off x="6309360" y="2397278"/>
-            <a:ext cx="5029200" cy="457200"/>
+            <a:off x="6766558" y="2561178"/>
+            <a:ext cx="4154484" cy="323165"/>
           </a:xfrm>
           <a:prstGeom prst="rect">
             <a:avLst/>
@@ -5471,8 +6742,8 @@
         </p:nvSpPr>
         <p:spPr>
           <a:xfrm>
-            <a:off x="6309360" y="2991638"/>
-            <a:ext cx="5029200" cy="1097280"/>
+            <a:off x="6766558" y="3155538"/>
+            <a:ext cx="3800798" cy="353943"/>
           </a:xfrm>
           <a:prstGeom prst="rect">
             <a:avLst/>
@@ -5519,8 +6790,8 @@
         </p:nvSpPr>
         <p:spPr>
           <a:xfrm>
-            <a:off x="6309360" y="3631718"/>
-            <a:ext cx="5029200" cy="1097280"/>
+            <a:off x="6766558" y="3795618"/>
+            <a:ext cx="3671402" cy="353943"/>
           </a:xfrm>
           <a:prstGeom prst="rect">
             <a:avLst/>
@@ -5539,7 +6810,7 @@
               </a:spcAft>
             </a:pPr>
             <a:r>
-              <a:rPr sz="1700" b="1">
+              <a:rPr sz="1700" b="1" dirty="0">
                 <a:solidFill>
                   <a:srgbClr val="0072B2"/>
                 </a:solidFill>
@@ -5548,7 +6819,7 @@
               <a:t>●  </a:t>
             </a:r>
             <a:r>
-              <a:rPr sz="1700">
+              <a:rPr sz="1700" dirty="0">
                 <a:solidFill>
                   <a:srgbClr val="222B33"/>
                 </a:solidFill>
@@ -5567,7 +6838,7 @@
         </p:nvSpPr>
         <p:spPr>
           <a:xfrm>
-            <a:off x="6309360" y="4546118"/>
+            <a:off x="7117440" y="4328146"/>
             <a:ext cx="3800798" cy="610680"/>
           </a:xfrm>
           <a:prstGeom prst="rect">
@@ -5664,7 +6935,7 @@
         <p:spPr>
           <a:xfrm>
             <a:off x="531602" y="3191204"/>
-            <a:ext cx="5120640" cy="2924921"/>
+            <a:ext cx="5623560" cy="2924921"/>
           </a:xfrm>
           <a:prstGeom prst="roundRect">
             <a:avLst>
@@ -5717,7 +6988,7 @@
         <p:spPr>
           <a:xfrm>
             <a:off x="548640" y="1372460"/>
-            <a:ext cx="5120640" cy="1737360"/>
+            <a:ext cx="5606522" cy="1737360"/>
           </a:xfrm>
           <a:prstGeom prst="roundRect">
             <a:avLst>
@@ -5851,8 +7122,8 @@
         </p:nvSpPr>
         <p:spPr>
           <a:xfrm>
-            <a:off x="730657" y="4191027"/>
-            <a:ext cx="4480560" cy="1661993"/>
+            <a:off x="730656" y="4191027"/>
+            <a:ext cx="6049706" cy="1218282"/>
           </a:xfrm>
           <a:prstGeom prst="rect">
             <a:avLst/>
@@ -5936,8 +7207,25 @@
                 </a:solidFill>
                 <a:latin typeface="Calibri"/>
               </a:rPr>
-              <a:t>Wants a nice, family-friendly, socially
-connected neighborhood</a:t>
+              <a:t>Wants a nice, family-friendly, socially</a:t>
+            </a:r>
+            <a:r>
+              <a:rPr lang="en-US" sz="1550" dirty="0">
+                <a:solidFill>
+                  <a:srgbClr val="FFFFFF"/>
+                </a:solidFill>
+                <a:latin typeface="Calibri"/>
+              </a:rPr>
+              <a:t> </a:t>
+            </a:r>
+            <a:r>
+              <a:rPr sz="1550" dirty="0">
+                <a:solidFill>
+                  <a:srgbClr val="FFFFFF"/>
+                </a:solidFill>
+                <a:latin typeface="Calibri"/>
+              </a:rPr>
+              <a:t>connected neighborhood</a:t>
             </a:r>
           </a:p>
         </p:txBody>
@@ -6776,7 +8064,7 @@
         <p:spPr>
           <a:xfrm>
             <a:off x="548640" y="3749039"/>
-            <a:ext cx="5577840" cy="2651760"/>
+            <a:ext cx="5054992" cy="2292935"/>
           </a:xfrm>
           <a:prstGeom prst="rect">
             <a:avLst/>
@@ -6966,8 +8254,8 @@
         </p:nvSpPr>
         <p:spPr>
           <a:xfrm>
-            <a:off x="6446520" y="3337560"/>
-            <a:ext cx="5166360" cy="3063240"/>
+            <a:off x="5891628" y="3525126"/>
+            <a:ext cx="4663440" cy="2336409"/>
           </a:xfrm>
           <a:prstGeom prst="roundRect">
             <a:avLst>
@@ -7015,7 +8303,7 @@
         </p:nvSpPr>
         <p:spPr>
           <a:xfrm>
-            <a:off x="6720840" y="3566160"/>
+            <a:off x="6165948" y="3753726"/>
             <a:ext cx="4663440" cy="365760"/>
           </a:xfrm>
           <a:prstGeom prst="rect">
@@ -7050,8 +8338,8 @@
         </p:nvSpPr>
         <p:spPr>
           <a:xfrm>
-            <a:off x="6720840" y="4023360"/>
-            <a:ext cx="4663440" cy="2286000"/>
+            <a:off x="6165948" y="4210926"/>
+            <a:ext cx="4663440" cy="1282402"/>
           </a:xfrm>
           <a:prstGeom prst="rect">
             <a:avLst/>
@@ -7070,7 +8358,7 @@
               </a:spcAft>
             </a:pPr>
             <a:r>
-              <a:rPr sz="1350" b="1">
+              <a:rPr sz="1350" b="1" dirty="0">
                 <a:solidFill>
                   <a:srgbClr val="0072B2"/>
                 </a:solidFill>
@@ -7079,7 +8367,7 @@
               <a:t>●  </a:t>
             </a:r>
             <a:r>
-              <a:rPr sz="1350">
+              <a:rPr sz="1350" dirty="0">
                 <a:solidFill>
                   <a:srgbClr val="222B33"/>
                 </a:solidFill>
@@ -7095,7 +8383,7 @@
               </a:spcAft>
             </a:pPr>
             <a:r>
-              <a:rPr sz="1350" b="1">
+              <a:rPr sz="1350" b="1" dirty="0">
                 <a:solidFill>
                   <a:srgbClr val="0072B2"/>
                 </a:solidFill>
@@ -7104,7 +8392,7 @@
               <a:t>●  </a:t>
             </a:r>
             <a:r>
-              <a:rPr sz="1350">
+              <a:rPr sz="1350" dirty="0">
                 <a:solidFill>
                   <a:srgbClr val="222B33"/>
                 </a:solidFill>
@@ -7113,7 +8401,7 @@
               <a:t>Which neighborhood is both “nice” and family-friendly,</a:t>
             </a:r>
             <a:br>
-              <a:rPr sz="1350">
+              <a:rPr sz="1350" dirty="0">
                 <a:solidFill>
                   <a:srgbClr val="222B33"/>
                 </a:solidFill>
@@ -7121,7 +8409,7 @@
               </a:rPr>
             </a:br>
             <a:r>
-              <a:rPr sz="1350">
+              <a:rPr sz="1350" dirty="0">
                 <a:solidFill>
                   <a:srgbClr val="222B33"/>
                 </a:solidFill>
@@ -7137,7 +8425,7 @@
               </a:spcAft>
             </a:pPr>
             <a:r>
-              <a:rPr sz="1350" b="1">
+              <a:rPr sz="1350" b="1" dirty="0">
                 <a:solidFill>
                   <a:srgbClr val="0072B2"/>
                 </a:solidFill>
@@ -7146,7 +8434,7 @@
               <a:t>●  </a:t>
             </a:r>
             <a:r>
-              <a:rPr sz="1350">
+              <a:rPr sz="1350" dirty="0">
                 <a:solidFill>
                   <a:srgbClr val="222B33"/>
                 </a:solidFill>
@@ -7203,17 +8491,15 @@
 <file path=ppt/slides/slide5.xml><?xml version="1.0" encoding="utf-8"?>
 <p:sld xmlns:a="http://schemas.openxmlformats.org/drawingml/2006/main" xmlns:r="http://schemas.openxmlformats.org/officeDocument/2006/relationships" xmlns:p="http://schemas.openxmlformats.org/presentationml/2006/main">
   <p:cSld>
-    <p:bg>
-      <p:bgPr>
-        <a:solidFill>
-          <a:srgbClr val="FFFFFF"/>
-        </a:solidFill>
-        <a:effectLst/>
-      </p:bgPr>
-    </p:bg>
     <p:spTree>
       <p:nvGrpSpPr>
-        <p:cNvPr id="1" name=""/>
+        <p:cNvPr id="1" name="">
+          <a:extLst>
+            <a:ext uri="{FF2B5EF4-FFF2-40B4-BE49-F238E27FC236}">
+              <a16:creationId xmlns:a16="http://schemas.microsoft.com/office/drawing/2014/main" id="{88E9EE41-C66C-0951-2519-1AFC4F24E9B8}"/>
+            </a:ext>
+          </a:extLst>
+        </p:cNvPr>
         <p:cNvGrpSpPr/>
         <p:nvPr/>
       </p:nvGrpSpPr>
@@ -7225,9 +8511,77 @@
           <a:chExt cx="0" cy="0"/>
         </a:xfrm>
       </p:grpSpPr>
-      <p:sp>
-        <p:nvSpPr>
-          <p:cNvPr id="2" name="Rectangle 1"/>
+      <p:pic>
+        <p:nvPicPr>
+          <p:cNvPr id="7" name="Picture 6" descr="hyp1_budget_bedrooms.png">
+            <a:extLst>
+              <a:ext uri="{FF2B5EF4-FFF2-40B4-BE49-F238E27FC236}">
+                <a16:creationId xmlns:a16="http://schemas.microsoft.com/office/drawing/2014/main" id="{D3DCBCB1-4B41-0CBF-E316-F585D804D26A}"/>
+              </a:ext>
+            </a:extLst>
+          </p:cNvPr>
+          <p:cNvPicPr>
+            <a:picLocks noChangeAspect="1"/>
+          </p:cNvPicPr>
+          <p:nvPr/>
+        </p:nvPicPr>
+        <p:blipFill>
+          <a:blip r:embed="rId2"/>
+          <a:srcRect l="50192"/>
+          <a:stretch>
+            <a:fillRect/>
+          </a:stretch>
+        </p:blipFill>
+        <p:spPr>
+          <a:xfrm>
+            <a:off x="5760720" y="1959226"/>
+            <a:ext cx="4777920" cy="3953234"/>
+          </a:xfrm>
+          <a:prstGeom prst="rect">
+            <a:avLst/>
+          </a:prstGeom>
+        </p:spPr>
+      </p:pic>
+      <p:pic>
+        <p:nvPicPr>
+          <p:cNvPr id="15" name="Picture 14" descr="hyp1_budget_bedrooms.png">
+            <a:extLst>
+              <a:ext uri="{FF2B5EF4-FFF2-40B4-BE49-F238E27FC236}">
+                <a16:creationId xmlns:a16="http://schemas.microsoft.com/office/drawing/2014/main" id="{4BE9D3C2-F53D-D0EC-C02C-B9EEEF9C3762}"/>
+              </a:ext>
+            </a:extLst>
+          </p:cNvPr>
+          <p:cNvPicPr>
+            <a:picLocks noChangeAspect="1"/>
+          </p:cNvPicPr>
+          <p:nvPr/>
+        </p:nvPicPr>
+        <p:blipFill>
+          <a:blip r:embed="rId2"/>
+          <a:srcRect r="50192"/>
+          <a:stretch>
+            <a:fillRect/>
+          </a:stretch>
+        </p:blipFill>
+        <p:spPr>
+          <a:xfrm>
+            <a:off x="596336" y="1959226"/>
+            <a:ext cx="4777920" cy="3953234"/>
+          </a:xfrm>
+          <a:prstGeom prst="rect">
+            <a:avLst/>
+          </a:prstGeom>
+        </p:spPr>
+      </p:pic>
+      <p:sp>
+        <p:nvSpPr>
+          <p:cNvPr id="2" name="Rectangle 1">
+            <a:extLst>
+              <a:ext uri="{FF2B5EF4-FFF2-40B4-BE49-F238E27FC236}">
+                <a16:creationId xmlns:a16="http://schemas.microsoft.com/office/drawing/2014/main" id="{EE5FCA1A-38C4-3E99-B91F-ADF6E49C7CFA}"/>
+              </a:ext>
+            </a:extLst>
+          </p:cNvPr>
           <p:cNvSpPr/>
           <p:nvPr/>
         </p:nvSpPr>
@@ -7272,7 +8626,13 @@
       </p:sp>
       <p:sp>
         <p:nvSpPr>
-          <p:cNvPr id="3" name="TextBox 2"/>
+          <p:cNvPr id="3" name="TextBox 2">
+            <a:extLst>
+              <a:ext uri="{FF2B5EF4-FFF2-40B4-BE49-F238E27FC236}">
+                <a16:creationId xmlns:a16="http://schemas.microsoft.com/office/drawing/2014/main" id="{21CCEAE7-4ED9-F128-94F5-1AC1BEAA975B}"/>
+              </a:ext>
+            </a:extLst>
+          </p:cNvPr>
           <p:cNvSpPr txBox="1"/>
           <p:nvPr/>
         </p:nvSpPr>
@@ -7307,7 +8667,13 @@
       </p:sp>
       <p:sp>
         <p:nvSpPr>
-          <p:cNvPr id="4" name="TextBox 3"/>
+          <p:cNvPr id="4" name="TextBox 3">
+            <a:extLst>
+              <a:ext uri="{FF2B5EF4-FFF2-40B4-BE49-F238E27FC236}">
+                <a16:creationId xmlns:a16="http://schemas.microsoft.com/office/drawing/2014/main" id="{3A0B32A7-EB12-5B0D-5EC0-CB446141468A}"/>
+              </a:ext>
+            </a:extLst>
+          </p:cNvPr>
           <p:cNvSpPr txBox="1"/>
           <p:nvPr/>
         </p:nvSpPr>
@@ -7342,14 +8708,20 @@
       </p:sp>
       <p:sp>
         <p:nvSpPr>
-          <p:cNvPr id="5" name="TextBox 4"/>
+          <p:cNvPr id="5" name="TextBox 4">
+            <a:extLst>
+              <a:ext uri="{FF2B5EF4-FFF2-40B4-BE49-F238E27FC236}">
+                <a16:creationId xmlns:a16="http://schemas.microsoft.com/office/drawing/2014/main" id="{C1F80BA6-4DFE-1151-C5E8-4D1031D313F8}"/>
+              </a:ext>
+            </a:extLst>
+          </p:cNvPr>
           <p:cNvSpPr txBox="1"/>
           <p:nvPr/>
         </p:nvSpPr>
         <p:spPr>
           <a:xfrm>
-            <a:off x="548640" y="1554480"/>
-            <a:ext cx="5212080" cy="640080"/>
+            <a:off x="548640" y="1207008"/>
+            <a:ext cx="5212080" cy="592535"/>
           </a:xfrm>
           <a:prstGeom prst="rect">
             <a:avLst/>
@@ -7368,7 +8740,7 @@
               </a:lnSpc>
             </a:pPr>
             <a:r>
-              <a:rPr sz="1350" b="0" i="0">
+              <a:rPr sz="1350" b="1" i="0" dirty="0">
                 <a:solidFill>
                   <a:srgbClr val="555F6B"/>
                 </a:solidFill>
@@ -7384,7 +8756,7 @@
               </a:lnSpc>
             </a:pPr>
             <a:r>
-              <a:rPr sz="1350" b="0" i="0">
+              <a:rPr sz="1350" b="1" i="0" dirty="0">
                 <a:solidFill>
                   <a:srgbClr val="555F6B"/>
                 </a:solidFill>
@@ -7397,98 +8769,20 @@
       </p:sp>
       <p:sp>
         <p:nvSpPr>
-          <p:cNvPr id="6" name="Rounded Rectangle 5"/>
-          <p:cNvSpPr/>
-          <p:nvPr/>
-        </p:nvSpPr>
-        <p:spPr>
-          <a:xfrm>
-            <a:off x="548640" y="2331720"/>
-            <a:ext cx="5212080" cy="1051560"/>
-          </a:xfrm>
-          <a:prstGeom prst="roundRect">
-            <a:avLst>
-              <a:gd name="adj" fmla="val 12000"/>
-            </a:avLst>
-          </a:prstGeom>
-          <a:solidFill>
-            <a:srgbClr val="F4F6F9"/>
-          </a:solidFill>
-          <a:ln w="9525">
-            <a:solidFill>
-              <a:srgbClr val="DDE3EA"/>
-            </a:solidFill>
-          </a:ln>
-          <a:effectLst/>
-        </p:spPr>
-        <p:style>
-          <a:lnRef idx="1">
-            <a:schemeClr val="accent1"/>
-          </a:lnRef>
-          <a:fillRef idx="3">
-            <a:schemeClr val="accent1"/>
-          </a:fillRef>
-          <a:effectRef idx="2">
-            <a:schemeClr val="accent1"/>
-          </a:effectRef>
-          <a:fontRef idx="minor">
-            <a:schemeClr val="lt1"/>
-          </a:fontRef>
-        </p:style>
-        <p:txBody>
-          <a:bodyPr rtlCol="0" anchor="ctr"/>
-          <a:lstStyle/>
-          <a:p>
-            <a:pPr algn="ctr"/>
-            <a:endParaRPr/>
-          </a:p>
-        </p:txBody>
-      </p:sp>
-      <p:sp>
-        <p:nvSpPr>
-          <p:cNvPr id="7" name="TextBox 6"/>
+          <p:cNvPr id="8" name="TextBox 7">
+            <a:extLst>
+              <a:ext uri="{FF2B5EF4-FFF2-40B4-BE49-F238E27FC236}">
+                <a16:creationId xmlns:a16="http://schemas.microsoft.com/office/drawing/2014/main" id="{6CE08719-D10E-7D29-7689-B62C3FD5D7D9}"/>
+              </a:ext>
+            </a:extLst>
+          </p:cNvPr>
           <p:cNvSpPr txBox="1"/>
           <p:nvPr/>
         </p:nvSpPr>
         <p:spPr>
           <a:xfrm>
-            <a:off x="548640" y="2404872"/>
-            <a:ext cx="5212080" cy="578358"/>
-          </a:xfrm>
-          <a:prstGeom prst="rect">
-            <a:avLst/>
-          </a:prstGeom>
-          <a:noFill/>
-        </p:spPr>
-        <p:txBody>
-          <a:bodyPr wrap="square" anchor="ctr">
-            <a:spAutoFit/>
-          </a:bodyPr>
-          <a:lstStyle/>
-          <a:p>
-            <a:pPr algn="ctr"/>
-            <a:r>
-              <a:rPr sz="2800" b="1" i="0">
-                <a:solidFill>
-                  <a:srgbClr val="0072B2"/>
-                </a:solidFill>
-                <a:latin typeface="Calibri"/>
-              </a:rPr>
-              <a:t>$322K</a:t>
-            </a:r>
-          </a:p>
-        </p:txBody>
-      </p:sp>
-      <p:sp>
-        <p:nvSpPr>
-          <p:cNvPr id="8" name="TextBox 7"/>
-          <p:cNvSpPr txBox="1"/>
-          <p:nvPr/>
-        </p:nvSpPr>
-        <p:spPr>
-          <a:xfrm>
-            <a:off x="685800" y="2905593"/>
-            <a:ext cx="4937760" cy="420624"/>
+            <a:off x="3154680" y="2636858"/>
+            <a:ext cx="1696815" cy="779637"/>
           </a:xfrm>
           <a:prstGeom prst="rect">
             <a:avLst/>
@@ -7507,14 +8801,19 @@
               </a:lnSpc>
             </a:pPr>
             <a:r>
-              <a:rPr sz="1150" b="0" i="0" dirty="0">
-                <a:solidFill>
-                  <a:srgbClr val="555F6B"/>
-                </a:solidFill>
-                <a:latin typeface="Calibri"/>
-              </a:rPr>
-              <a:t>budget ceiling</a:t>
-            </a:r>
+              <a:rPr lang="en-US" sz="2000" b="1" dirty="0">
+                <a:solidFill>
+                  <a:srgbClr val="0072B2"/>
+                </a:solidFill>
+              </a:rPr>
+              <a:t>$322K</a:t>
+            </a:r>
+            <a:endParaRPr lang="en-US" sz="1150" b="0" i="0" dirty="0">
+              <a:solidFill>
+                <a:srgbClr val="555F6B"/>
+              </a:solidFill>
+              <a:latin typeface="Calibri"/>
+            </a:endParaRPr>
           </a:p>
           <a:p>
             <a:pPr algn="ctr">
@@ -7529,116 +8828,9 @@
                 </a:solidFill>
                 <a:latin typeface="Calibri"/>
               </a:rPr>
-              <a:t>(25th percentile of price)</a:t>
-            </a:r>
-          </a:p>
-        </p:txBody>
-      </p:sp>
-      <p:sp>
-        <p:nvSpPr>
-          <p:cNvPr id="9" name="Rounded Rectangle 8"/>
-          <p:cNvSpPr/>
-          <p:nvPr/>
-        </p:nvSpPr>
-        <p:spPr>
-          <a:xfrm>
-            <a:off x="548640" y="3520440"/>
-            <a:ext cx="5212080" cy="1051560"/>
-          </a:xfrm>
-          <a:prstGeom prst="roundRect">
-            <a:avLst>
-              <a:gd name="adj" fmla="val 12000"/>
-            </a:avLst>
-          </a:prstGeom>
-          <a:solidFill>
-            <a:srgbClr val="F4F6F9"/>
-          </a:solidFill>
-          <a:ln w="9525">
-            <a:solidFill>
-              <a:srgbClr val="DDE3EA"/>
-            </a:solidFill>
-          </a:ln>
-          <a:effectLst/>
-        </p:spPr>
-        <p:style>
-          <a:lnRef idx="1">
-            <a:schemeClr val="accent1"/>
-          </a:lnRef>
-          <a:fillRef idx="3">
-            <a:schemeClr val="accent1"/>
-          </a:fillRef>
-          <a:effectRef idx="2">
-            <a:schemeClr val="accent1"/>
-          </a:effectRef>
-          <a:fontRef idx="minor">
-            <a:schemeClr val="lt1"/>
-          </a:fontRef>
-        </p:style>
-        <p:txBody>
-          <a:bodyPr rtlCol="0" anchor="ctr"/>
-          <a:lstStyle/>
-          <a:p>
-            <a:pPr algn="ctr"/>
-            <a:endParaRPr/>
-          </a:p>
-        </p:txBody>
-      </p:sp>
-      <p:sp>
-        <p:nvSpPr>
-          <p:cNvPr id="10" name="TextBox 9"/>
-          <p:cNvSpPr txBox="1"/>
-          <p:nvPr/>
-        </p:nvSpPr>
-        <p:spPr>
-          <a:xfrm>
-            <a:off x="548640" y="3593592"/>
-            <a:ext cx="5212080" cy="578358"/>
-          </a:xfrm>
-          <a:prstGeom prst="rect">
-            <a:avLst/>
-          </a:prstGeom>
-          <a:noFill/>
-        </p:spPr>
-        <p:txBody>
-          <a:bodyPr wrap="square" anchor="ctr">
-            <a:spAutoFit/>
-          </a:bodyPr>
-          <a:lstStyle/>
-          <a:p>
-            <a:pPr algn="ctr"/>
-            <a:r>
-              <a:rPr sz="2800" b="1" i="0">
-                <a:solidFill>
-                  <a:srgbClr val="0072B2"/>
-                </a:solidFill>
-                <a:latin typeface="Calibri"/>
-              </a:rPr>
-              <a:t>1,227</a:t>
-            </a:r>
-          </a:p>
-        </p:txBody>
-      </p:sp>
-      <p:sp>
-        <p:nvSpPr>
-          <p:cNvPr id="11" name="TextBox 10"/>
-          <p:cNvSpPr txBox="1"/>
-          <p:nvPr/>
-        </p:nvSpPr>
-        <p:spPr>
-          <a:xfrm>
-            <a:off x="685800" y="4102940"/>
-            <a:ext cx="4937760" cy="420624"/>
-          </a:xfrm>
-          <a:prstGeom prst="rect">
-            <a:avLst/>
-          </a:prstGeom>
-          <a:noFill/>
-        </p:spPr>
-        <p:txBody>
-          <a:bodyPr wrap="square" anchor="t">
-            <a:spAutoFit/>
-          </a:bodyPr>
-          <a:lstStyle/>
+              <a:t>budget ceiling</a:t>
+            </a:r>
+          </a:p>
           <a:p>
             <a:pPr algn="ctr">
               <a:lnSpc>
@@ -7646,15 +8838,44 @@
               </a:lnSpc>
             </a:pPr>
             <a:r>
-              <a:rPr sz="1150" b="0" i="0">
+              <a:rPr sz="1150" b="0" i="0" dirty="0">
                 <a:solidFill>
                   <a:srgbClr val="555F6B"/>
                 </a:solidFill>
                 <a:latin typeface="Calibri"/>
               </a:rPr>
-              <a:t>homes with 4+ bedrooms</a:t>
-            </a:r>
-          </a:p>
+              <a:t>(25th percentile of price)</a:t>
+            </a:r>
+          </a:p>
+        </p:txBody>
+      </p:sp>
+      <p:sp>
+        <p:nvSpPr>
+          <p:cNvPr id="11" name="TextBox 10">
+            <a:extLst>
+              <a:ext uri="{FF2B5EF4-FFF2-40B4-BE49-F238E27FC236}">
+                <a16:creationId xmlns:a16="http://schemas.microsoft.com/office/drawing/2014/main" id="{D573A297-34A4-154D-B392-6AB2DCC8EBFD}"/>
+              </a:ext>
+            </a:extLst>
+          </p:cNvPr>
+          <p:cNvSpPr txBox="1"/>
+          <p:nvPr/>
+        </p:nvSpPr>
+        <p:spPr>
+          <a:xfrm>
+            <a:off x="8409427" y="2414028"/>
+            <a:ext cx="1984002" cy="779637"/>
+          </a:xfrm>
+          <a:prstGeom prst="rect">
+            <a:avLst/>
+          </a:prstGeom>
+          <a:noFill/>
+        </p:spPr>
+        <p:txBody>
+          <a:bodyPr wrap="square" anchor="t">
+            <a:spAutoFit/>
+          </a:bodyPr>
+          <a:lstStyle/>
           <a:p>
             <a:pPr algn="ctr">
               <a:lnSpc>
@@ -7662,122 +8883,20 @@
               </a:lnSpc>
             </a:pPr>
             <a:r>
-              <a:rPr sz="1150" b="0" i="0">
-                <a:solidFill>
-                  <a:srgbClr val="555F6B"/>
-                </a:solidFill>
-                <a:latin typeface="Calibri"/>
-              </a:rPr>
-              <a:t>within that budget</a:t>
-            </a:r>
-          </a:p>
-        </p:txBody>
-      </p:sp>
-      <p:sp>
-        <p:nvSpPr>
-          <p:cNvPr id="12" name="Rounded Rectangle 11"/>
-          <p:cNvSpPr/>
-          <p:nvPr/>
-        </p:nvSpPr>
-        <p:spPr>
-          <a:xfrm>
-            <a:off x="548640" y="4709160"/>
-            <a:ext cx="5212080" cy="1051560"/>
-          </a:xfrm>
-          <a:prstGeom prst="roundRect">
-            <a:avLst>
-              <a:gd name="adj" fmla="val 12000"/>
-            </a:avLst>
-          </a:prstGeom>
-          <a:solidFill>
-            <a:srgbClr val="F4F6F9"/>
-          </a:solidFill>
-          <a:ln w="9525">
-            <a:solidFill>
-              <a:srgbClr val="DDE3EA"/>
-            </a:solidFill>
-          </a:ln>
-          <a:effectLst/>
-        </p:spPr>
-        <p:style>
-          <a:lnRef idx="1">
-            <a:schemeClr val="accent1"/>
-          </a:lnRef>
-          <a:fillRef idx="3">
-            <a:schemeClr val="accent1"/>
-          </a:fillRef>
-          <a:effectRef idx="2">
-            <a:schemeClr val="accent1"/>
-          </a:effectRef>
-          <a:fontRef idx="minor">
-            <a:schemeClr val="lt1"/>
-          </a:fontRef>
-        </p:style>
-        <p:txBody>
-          <a:bodyPr rtlCol="0" anchor="ctr"/>
-          <a:lstStyle/>
-          <a:p>
-            <a:pPr algn="ctr"/>
-            <a:endParaRPr/>
-          </a:p>
-        </p:txBody>
-      </p:sp>
-      <p:sp>
-        <p:nvSpPr>
-          <p:cNvPr id="13" name="TextBox 12"/>
-          <p:cNvSpPr txBox="1"/>
-          <p:nvPr/>
-        </p:nvSpPr>
-        <p:spPr>
-          <a:xfrm>
-            <a:off x="548640" y="4782312"/>
-            <a:ext cx="5212080" cy="578358"/>
-          </a:xfrm>
-          <a:prstGeom prst="rect">
-            <a:avLst/>
-          </a:prstGeom>
-          <a:noFill/>
-        </p:spPr>
-        <p:txBody>
-          <a:bodyPr wrap="square" anchor="ctr">
-            <a:spAutoFit/>
-          </a:bodyPr>
-          <a:lstStyle/>
-          <a:p>
-            <a:pPr algn="ctr"/>
-            <a:r>
-              <a:rPr sz="2800" b="1" i="0">
+              <a:rPr lang="en-US" sz="2000" b="1" dirty="0">
                 <a:solidFill>
                   <a:srgbClr val="0072B2"/>
                 </a:solidFill>
-                <a:latin typeface="Calibri"/>
-              </a:rPr>
-              <a:t>5.7%</a:t>
-            </a:r>
-          </a:p>
-        </p:txBody>
-      </p:sp>
-      <p:sp>
-        <p:nvSpPr>
-          <p:cNvPr id="14" name="TextBox 13"/>
-          <p:cNvSpPr txBox="1"/>
-          <p:nvPr/>
-        </p:nvSpPr>
-        <p:spPr>
-          <a:xfrm>
-            <a:off x="685800" y="5274408"/>
-            <a:ext cx="4937760" cy="420624"/>
-          </a:xfrm>
-          <a:prstGeom prst="rect">
-            <a:avLst/>
-          </a:prstGeom>
-          <a:noFill/>
-        </p:spPr>
-        <p:txBody>
-          <a:bodyPr wrap="square" anchor="t">
-            <a:spAutoFit/>
-          </a:bodyPr>
-          <a:lstStyle/>
+              </a:rPr>
+              <a:t>1,227</a:t>
+            </a:r>
+            <a:endParaRPr lang="en-US" sz="2000" b="0" i="0" dirty="0">
+              <a:solidFill>
+                <a:srgbClr val="555F6B"/>
+              </a:solidFill>
+              <a:latin typeface="Calibri"/>
+            </a:endParaRPr>
+          </a:p>
           <a:p>
             <a:pPr algn="ctr">
               <a:lnSpc>
@@ -7791,7 +8910,7 @@
                 </a:solidFill>
                 <a:latin typeface="Calibri"/>
               </a:rPr>
-              <a:t>of all King County sales</a:t>
+              <a:t>homes with 4+ bedrooms</a:t>
             </a:r>
           </a:p>
           <a:p>
@@ -7807,38 +8926,102 @@
                 </a:solidFill>
                 <a:latin typeface="Calibri"/>
               </a:rPr>
+              <a:t>within that budget</a:t>
+            </a:r>
+          </a:p>
+        </p:txBody>
+      </p:sp>
+      <p:sp>
+        <p:nvSpPr>
+          <p:cNvPr id="14" name="TextBox 13">
+            <a:extLst>
+              <a:ext uri="{FF2B5EF4-FFF2-40B4-BE49-F238E27FC236}">
+                <a16:creationId xmlns:a16="http://schemas.microsoft.com/office/drawing/2014/main" id="{CC45B015-433E-63CB-BBD2-FB16F3A8D32A}"/>
+              </a:ext>
+            </a:extLst>
+          </p:cNvPr>
+          <p:cNvSpPr txBox="1"/>
+          <p:nvPr/>
+        </p:nvSpPr>
+        <p:spPr>
+          <a:xfrm>
+            <a:off x="8409427" y="3369354"/>
+            <a:ext cx="2057400" cy="779637"/>
+          </a:xfrm>
+          <a:prstGeom prst="rect">
+            <a:avLst/>
+          </a:prstGeom>
+          <a:noFill/>
+        </p:spPr>
+        <p:txBody>
+          <a:bodyPr wrap="square" anchor="t">
+            <a:spAutoFit/>
+          </a:bodyPr>
+          <a:lstStyle/>
+          <a:p>
+            <a:pPr algn="ctr">
+              <a:lnSpc>
+                <a:spcPct val="105000"/>
+              </a:lnSpc>
+            </a:pPr>
+            <a:r>
+              <a:rPr lang="en-US" sz="2000" b="1" dirty="0">
+                <a:solidFill>
+                  <a:srgbClr val="0072B2"/>
+                </a:solidFill>
+              </a:rPr>
+              <a:t>5.7%</a:t>
+            </a:r>
+            <a:endParaRPr lang="en-US" sz="2000" b="0" i="0" dirty="0">
+              <a:solidFill>
+                <a:srgbClr val="555F6B"/>
+              </a:solidFill>
+              <a:latin typeface="Calibri"/>
+            </a:endParaRPr>
+          </a:p>
+          <a:p>
+            <a:pPr algn="ctr">
+              <a:lnSpc>
+                <a:spcPct val="105000"/>
+              </a:lnSpc>
+            </a:pPr>
+            <a:r>
+              <a:rPr sz="1150" b="0" i="0" dirty="0">
+                <a:solidFill>
+                  <a:srgbClr val="555F6B"/>
+                </a:solidFill>
+                <a:latin typeface="Calibri"/>
+              </a:rPr>
+              <a:t>of all King County sales</a:t>
+            </a:r>
+          </a:p>
+          <a:p>
+            <a:pPr algn="ctr">
+              <a:lnSpc>
+                <a:spcPct val="105000"/>
+              </a:lnSpc>
+            </a:pPr>
+            <a:r>
+              <a:rPr sz="1150" b="0" i="0" dirty="0">
+                <a:solidFill>
+                  <a:srgbClr val="555F6B"/>
+                </a:solidFill>
+                <a:latin typeface="Calibri"/>
+              </a:rPr>
               <a:t>fit his needs</a:t>
             </a:r>
           </a:p>
         </p:txBody>
       </p:sp>
-      <p:pic>
-        <p:nvPicPr>
-          <p:cNvPr id="15" name="Picture 14" descr="hyp1_budget_bedrooms.png"/>
-          <p:cNvPicPr>
-            <a:picLocks noChangeAspect="1"/>
-          </p:cNvPicPr>
-          <p:nvPr/>
-        </p:nvPicPr>
-        <p:blipFill>
-          <a:blip r:embed="rId2"/>
-          <a:stretch>
-            <a:fillRect/>
-          </a:stretch>
-        </p:blipFill>
-        <p:spPr>
-          <a:xfrm>
-            <a:off x="5989320" y="2544554"/>
-            <a:ext cx="5623560" cy="2317531"/>
-          </a:xfrm>
-          <a:prstGeom prst="rect">
-            <a:avLst/>
-          </a:prstGeom>
-        </p:spPr>
-      </p:pic>
-      <p:sp>
-        <p:nvSpPr>
-          <p:cNvPr id="16" name="Rectangle 15"/>
+      <p:sp>
+        <p:nvSpPr>
+          <p:cNvPr id="16" name="Rectangle 15">
+            <a:extLst>
+              <a:ext uri="{FF2B5EF4-FFF2-40B4-BE49-F238E27FC236}">
+                <a16:creationId xmlns:a16="http://schemas.microsoft.com/office/drawing/2014/main" id="{B17AC938-E68C-37A9-B1B1-EA0A18243274}"/>
+              </a:ext>
+            </a:extLst>
+          </p:cNvPr>
           <p:cNvSpPr/>
           <p:nvPr/>
         </p:nvSpPr>
@@ -7883,14 +9066,20 @@
       </p:sp>
       <p:sp>
         <p:nvSpPr>
-          <p:cNvPr id="17" name="TextBox 16"/>
+          <p:cNvPr id="17" name="TextBox 16">
+            <a:extLst>
+              <a:ext uri="{FF2B5EF4-FFF2-40B4-BE49-F238E27FC236}">
+                <a16:creationId xmlns:a16="http://schemas.microsoft.com/office/drawing/2014/main" id="{CC8F2E02-743D-EA3E-0CDD-D7E826DECCD4}"/>
+              </a:ext>
+            </a:extLst>
+          </p:cNvPr>
           <p:cNvSpPr txBox="1"/>
           <p:nvPr/>
         </p:nvSpPr>
         <p:spPr>
           <a:xfrm>
             <a:off x="777240" y="6108192"/>
-            <a:ext cx="10607040" cy="457200"/>
+            <a:ext cx="7391975" cy="323165"/>
           </a:xfrm>
           <a:prstGeom prst="rect">
             <a:avLst/>
@@ -7905,7 +9094,7 @@
           <a:p>
             <a:pPr algn="l"/>
             <a:r>
-              <a:rPr sz="1500" b="1" i="0">
+              <a:rPr sz="1500" b="1" i="0" dirty="0">
                 <a:solidFill>
                   <a:srgbClr val="F0E442"/>
                 </a:solidFill>
@@ -7918,7 +9107,13 @@
       </p:sp>
       <p:sp>
         <p:nvSpPr>
-          <p:cNvPr id="18" name="TextBox 17"/>
+          <p:cNvPr id="18" name="TextBox 17">
+            <a:extLst>
+              <a:ext uri="{FF2B5EF4-FFF2-40B4-BE49-F238E27FC236}">
+                <a16:creationId xmlns:a16="http://schemas.microsoft.com/office/drawing/2014/main" id="{515CB5E4-39B1-03EE-5310-7749F098DA5B}"/>
+              </a:ext>
+            </a:extLst>
+          </p:cNvPr>
           <p:cNvSpPr txBox="1"/>
           <p:nvPr/>
         </p:nvSpPr>
@@ -7952,10 +9147,226 @@
         </p:txBody>
       </p:sp>
     </p:spTree>
+    <p:extLst>
+      <p:ext uri="{BB962C8B-B14F-4D97-AF65-F5344CB8AC3E}">
+        <p14:creationId xmlns:p14="http://schemas.microsoft.com/office/powerpoint/2010/main" val="625522893"/>
+      </p:ext>
+    </p:extLst>
   </p:cSld>
   <p:clrMapOvr>
     <a:masterClrMapping/>
   </p:clrMapOvr>
+  <p:timing>
+    <p:tnLst>
+      <p:par>
+        <p:cTn id="1" dur="indefinite" restart="never" nodeType="tmRoot">
+          <p:childTnLst>
+            <p:seq concurrent="1" nextAc="seek">
+              <p:cTn id="2" dur="indefinite" nodeType="mainSeq">
+                <p:childTnLst>
+                  <p:par>
+                    <p:cTn id="3" fill="hold">
+                      <p:stCondLst>
+                        <p:cond delay="indefinite"/>
+                      </p:stCondLst>
+                      <p:childTnLst>
+                        <p:par>
+                          <p:cTn id="4" fill="hold">
+                            <p:stCondLst>
+                              <p:cond delay="0"/>
+                            </p:stCondLst>
+                            <p:childTnLst>
+                              <p:par>
+                                <p:cTn id="5" presetID="10" presetClass="entr" presetSubtype="0" fill="hold" grpId="0" nodeType="clickEffect">
+                                  <p:stCondLst>
+                                    <p:cond delay="0"/>
+                                  </p:stCondLst>
+                                  <p:childTnLst>
+                                    <p:set>
+                                      <p:cBhvr>
+                                        <p:cTn id="6" dur="1" fill="hold">
+                                          <p:stCondLst>
+                                            <p:cond delay="0"/>
+                                          </p:stCondLst>
+                                        </p:cTn>
+                                        <p:tgtEl>
+                                          <p:spTgt spid="11"/>
+                                        </p:tgtEl>
+                                        <p:attrNameLst>
+                                          <p:attrName>style.visibility</p:attrName>
+                                        </p:attrNameLst>
+                                      </p:cBhvr>
+                                      <p:to>
+                                        <p:strVal val="visible"/>
+                                      </p:to>
+                                    </p:set>
+                                    <p:animEffect transition="in" filter="fade">
+                                      <p:cBhvr>
+                                        <p:cTn id="7" dur="500"/>
+                                        <p:tgtEl>
+                                          <p:spTgt spid="11"/>
+                                        </p:tgtEl>
+                                      </p:cBhvr>
+                                    </p:animEffect>
+                                  </p:childTnLst>
+                                </p:cTn>
+                              </p:par>
+                              <p:par>
+                                <p:cTn id="8" presetID="10" presetClass="entr" presetSubtype="0" fill="hold" grpId="0" nodeType="withEffect">
+                                  <p:stCondLst>
+                                    <p:cond delay="0"/>
+                                  </p:stCondLst>
+                                  <p:childTnLst>
+                                    <p:set>
+                                      <p:cBhvr>
+                                        <p:cTn id="9" dur="1" fill="hold">
+                                          <p:stCondLst>
+                                            <p:cond delay="0"/>
+                                          </p:stCondLst>
+                                        </p:cTn>
+                                        <p:tgtEl>
+                                          <p:spTgt spid="14"/>
+                                        </p:tgtEl>
+                                        <p:attrNameLst>
+                                          <p:attrName>style.visibility</p:attrName>
+                                        </p:attrNameLst>
+                                      </p:cBhvr>
+                                      <p:to>
+                                        <p:strVal val="visible"/>
+                                      </p:to>
+                                    </p:set>
+                                    <p:animEffect transition="in" filter="fade">
+                                      <p:cBhvr>
+                                        <p:cTn id="10" dur="500"/>
+                                        <p:tgtEl>
+                                          <p:spTgt spid="14"/>
+                                        </p:tgtEl>
+                                      </p:cBhvr>
+                                    </p:animEffect>
+                                  </p:childTnLst>
+                                </p:cTn>
+                              </p:par>
+                              <p:par>
+                                <p:cTn id="11" presetID="10" presetClass="entr" presetSubtype="0" fill="hold" nodeType="withEffect">
+                                  <p:stCondLst>
+                                    <p:cond delay="0"/>
+                                  </p:stCondLst>
+                                  <p:childTnLst>
+                                    <p:set>
+                                      <p:cBhvr>
+                                        <p:cTn id="12" dur="1" fill="hold">
+                                          <p:stCondLst>
+                                            <p:cond delay="0"/>
+                                          </p:stCondLst>
+                                        </p:cTn>
+                                        <p:tgtEl>
+                                          <p:spTgt spid="7"/>
+                                        </p:tgtEl>
+                                        <p:attrNameLst>
+                                          <p:attrName>style.visibility</p:attrName>
+                                        </p:attrNameLst>
+                                      </p:cBhvr>
+                                      <p:to>
+                                        <p:strVal val="visible"/>
+                                      </p:to>
+                                    </p:set>
+                                    <p:animEffect transition="in" filter="fade">
+                                      <p:cBhvr>
+                                        <p:cTn id="13" dur="500"/>
+                                        <p:tgtEl>
+                                          <p:spTgt spid="7"/>
+                                        </p:tgtEl>
+                                      </p:cBhvr>
+                                    </p:animEffect>
+                                  </p:childTnLst>
+                                </p:cTn>
+                              </p:par>
+                            </p:childTnLst>
+                          </p:cTn>
+                        </p:par>
+                      </p:childTnLst>
+                    </p:cTn>
+                  </p:par>
+                  <p:par>
+                    <p:cTn id="14" fill="hold">
+                      <p:stCondLst>
+                        <p:cond delay="indefinite"/>
+                      </p:stCondLst>
+                      <p:childTnLst>
+                        <p:par>
+                          <p:cTn id="15" fill="hold">
+                            <p:stCondLst>
+                              <p:cond delay="0"/>
+                            </p:stCondLst>
+                            <p:childTnLst>
+                              <p:par>
+                                <p:cTn id="16" presetID="10" presetClass="entr" presetSubtype="0" fill="hold" grpId="0" nodeType="clickEffect">
+                                  <p:stCondLst>
+                                    <p:cond delay="0"/>
+                                  </p:stCondLst>
+                                  <p:childTnLst>
+                                    <p:set>
+                                      <p:cBhvr>
+                                        <p:cTn id="17" dur="1" fill="hold">
+                                          <p:stCondLst>
+                                            <p:cond delay="0"/>
+                                          </p:stCondLst>
+                                        </p:cTn>
+                                        <p:tgtEl>
+                                          <p:spTgt spid="17"/>
+                                        </p:tgtEl>
+                                        <p:attrNameLst>
+                                          <p:attrName>style.visibility</p:attrName>
+                                        </p:attrNameLst>
+                                      </p:cBhvr>
+                                      <p:to>
+                                        <p:strVal val="visible"/>
+                                      </p:to>
+                                    </p:set>
+                                    <p:animEffect transition="in" filter="fade">
+                                      <p:cBhvr>
+                                        <p:cTn id="18" dur="500"/>
+                                        <p:tgtEl>
+                                          <p:spTgt spid="17"/>
+                                        </p:tgtEl>
+                                      </p:cBhvr>
+                                    </p:animEffect>
+                                  </p:childTnLst>
+                                </p:cTn>
+                              </p:par>
+                            </p:childTnLst>
+                          </p:cTn>
+                        </p:par>
+                      </p:childTnLst>
+                    </p:cTn>
+                  </p:par>
+                </p:childTnLst>
+              </p:cTn>
+              <p:prevCondLst>
+                <p:cond evt="onPrev" delay="0">
+                  <p:tgtEl>
+                    <p:sldTgt/>
+                  </p:tgtEl>
+                </p:cond>
+              </p:prevCondLst>
+              <p:nextCondLst>
+                <p:cond evt="onNext" delay="0">
+                  <p:tgtEl>
+                    <p:sldTgt/>
+                  </p:tgtEl>
+                </p:cond>
+              </p:nextCondLst>
+            </p:seq>
+          </p:childTnLst>
+        </p:cTn>
+      </p:par>
+    </p:tnLst>
+    <p:bldLst>
+      <p:bldP spid="11" grpId="0"/>
+      <p:bldP spid="14" grpId="0"/>
+      <p:bldP spid="17" grpId="0"/>
+    </p:bldLst>
+  </p:timing>
 </p:sld>
 </file>
 
@@ -8101,69 +9512,14 @@
       </p:sp>
       <p:sp>
         <p:nvSpPr>
-          <p:cNvPr id="5" name="TextBox 4"/>
-          <p:cNvSpPr txBox="1"/>
-          <p:nvPr/>
-        </p:nvSpPr>
-        <p:spPr>
-          <a:xfrm>
-            <a:off x="548640" y="1417320"/>
-            <a:ext cx="5394960" cy="1554480"/>
-          </a:xfrm>
-          <a:prstGeom prst="rect">
-            <a:avLst/>
-          </a:prstGeom>
-          <a:noFill/>
-        </p:spPr>
-        <p:txBody>
-          <a:bodyPr wrap="square" anchor="t">
-            <a:spAutoFit/>
-          </a:bodyPr>
-          <a:lstStyle/>
-          <a:p>
-            <a:pPr algn="l">
-              <a:lnSpc>
-                <a:spcPct val="125000"/>
-              </a:lnSpc>
-            </a:pPr>
-            <a:r>
-              <a:rPr sz="1400" b="0" i="0">
-                <a:solidFill>
-                  <a:srgbClr val="555F6B"/>
-                </a:solidFill>
-                <a:latin typeface="Calibri"/>
-              </a:rPr>
-              <a:t>Among the affordable, family-sized homes, we grouped</a:t>
-            </a:r>
-          </a:p>
-          <a:p>
-            <a:pPr algn="l">
-              <a:lnSpc>
-                <a:spcPct val="125000"/>
-              </a:lnSpc>
-            </a:pPr>
-            <a:r>
-              <a:rPr sz="1400" b="0" i="0">
-                <a:solidFill>
-                  <a:srgbClr val="555F6B"/>
-                </a:solidFill>
-                <a:latin typeface="Calibri"/>
-              </a:rPr>
-              <a:t>by neighborhood and looked for areas that combine:</a:t>
-            </a:r>
-          </a:p>
-        </p:txBody>
-      </p:sp>
-      <p:sp>
-        <p:nvSpPr>
           <p:cNvPr id="6" name="TextBox 5"/>
           <p:cNvSpPr txBox="1"/>
           <p:nvPr/>
         </p:nvSpPr>
         <p:spPr>
           <a:xfrm>
-            <a:off x="548640" y="2148840"/>
-            <a:ext cx="5394960" cy="1463040"/>
+            <a:off x="660783" y="2016928"/>
+            <a:ext cx="4066492" cy="1102866"/>
           </a:xfrm>
           <a:prstGeom prst="rect">
             <a:avLst/>
@@ -8182,7 +9538,7 @@
               </a:spcAft>
             </a:pPr>
             <a:r>
-              <a:rPr sz="1350" b="1">
+              <a:rPr sz="1350" b="1" dirty="0">
                 <a:solidFill>
                   <a:srgbClr val="0072B2"/>
                 </a:solidFill>
@@ -8191,7 +9547,7 @@
               <a:t>●  </a:t>
             </a:r>
             <a:r>
-              <a:rPr sz="1350">
+              <a:rPr sz="1350" dirty="0">
                 <a:solidFill>
                   <a:srgbClr val="222B33"/>
                 </a:solidFill>
@@ -8200,7 +9556,7 @@
               <a:t>“Social density” — lots of other similarly affordable,</a:t>
             </a:r>
             <a:br>
-              <a:rPr sz="1350">
+              <a:rPr sz="1350" dirty="0">
                 <a:solidFill>
                   <a:srgbClr val="222B33"/>
                 </a:solidFill>
@@ -8208,7 +9564,7 @@
               </a:rPr>
             </a:br>
             <a:r>
-              <a:rPr sz="1350">
+              <a:rPr sz="1350" dirty="0">
                 <a:solidFill>
                   <a:srgbClr val="222B33"/>
                 </a:solidFill>
@@ -8224,7 +9580,7 @@
               </a:spcAft>
             </a:pPr>
             <a:r>
-              <a:rPr sz="1350" b="1">
+              <a:rPr sz="1350" b="1" dirty="0">
                 <a:solidFill>
                   <a:srgbClr val="0072B2"/>
                 </a:solidFill>
@@ -8233,7 +9589,7 @@
               <a:t>●  </a:t>
             </a:r>
             <a:r>
-              <a:rPr sz="1350">
+              <a:rPr sz="1350" dirty="0">
                 <a:solidFill>
                   <a:srgbClr val="222B33"/>
                 </a:solidFill>
@@ -8242,7 +9598,7 @@
               <a:t>“Niceness” — above-average home condition and</a:t>
             </a:r>
             <a:br>
-              <a:rPr sz="1350">
+              <a:rPr sz="1350" dirty="0">
                 <a:solidFill>
                   <a:srgbClr val="222B33"/>
                 </a:solidFill>
@@ -8250,7 +9606,7 @@
               </a:rPr>
             </a:br>
             <a:r>
-              <a:rPr sz="1350">
+              <a:rPr sz="1350" dirty="0">
                 <a:solidFill>
                   <a:srgbClr val="222B33"/>
                 </a:solidFill>
@@ -8269,8 +9625,8 @@
         </p:nvSpPr>
         <p:spPr>
           <a:xfrm>
-            <a:off x="548640" y="3977639"/>
-            <a:ext cx="5394960" cy="2286000"/>
+            <a:off x="548640" y="3969013"/>
+            <a:ext cx="4178635" cy="1793432"/>
           </a:xfrm>
           <a:prstGeom prst="roundRect">
             <a:avLst>
@@ -8318,8 +9674,8 @@
         </p:nvSpPr>
         <p:spPr>
           <a:xfrm>
-            <a:off x="822960" y="4160520"/>
-            <a:ext cx="4937760" cy="365760"/>
+            <a:off x="874716" y="4186398"/>
+            <a:ext cx="3076180" cy="292388"/>
           </a:xfrm>
           <a:prstGeom prst="rect">
             <a:avLst/>
@@ -8334,7 +9690,7 @@
           <a:p>
             <a:pPr algn="l"/>
             <a:r>
-              <a:rPr sz="1300" b="1" i="0">
+              <a:rPr sz="1300" b="1" i="0" dirty="0">
                 <a:solidFill>
                   <a:srgbClr val="0072B2"/>
                 </a:solidFill>
@@ -8353,8 +9709,8 @@
         </p:nvSpPr>
         <p:spPr>
           <a:xfrm>
-            <a:off x="822960" y="4572000"/>
-            <a:ext cx="4937760" cy="1554480"/>
+            <a:off x="681484" y="4478786"/>
+            <a:ext cx="3904315" cy="925894"/>
           </a:xfrm>
           <a:prstGeom prst="rect">
             <a:avLst/>
@@ -8373,7 +9729,7 @@
               </a:spcAft>
             </a:pPr>
             <a:r>
-              <a:rPr sz="1250" b="1">
+              <a:rPr sz="1250" b="1" dirty="0">
                 <a:solidFill>
                   <a:srgbClr val="0072B2"/>
                 </a:solidFill>
@@ -8382,7 +9738,7 @@
               <a:t>●  </a:t>
             </a:r>
             <a:r>
-              <a:rPr sz="1250">
+              <a:rPr sz="1250" dirty="0">
                 <a:solidFill>
                   <a:srgbClr val="222B33"/>
                 </a:solidFill>
@@ -8398,7 +9754,7 @@
               </a:spcAft>
             </a:pPr>
             <a:r>
-              <a:rPr sz="1250" b="1">
+              <a:rPr sz="1250" b="1" dirty="0">
                 <a:solidFill>
                   <a:srgbClr val="0072B2"/>
                 </a:solidFill>
@@ -8407,7 +9763,7 @@
               <a:t>●  </a:t>
             </a:r>
             <a:r>
-              <a:rPr sz="1250">
+              <a:rPr sz="1250" dirty="0">
                 <a:solidFill>
                   <a:srgbClr val="222B33"/>
                 </a:solidFill>
@@ -8423,7 +9779,7 @@
               </a:spcAft>
             </a:pPr>
             <a:r>
-              <a:rPr sz="1250" b="1">
+              <a:rPr sz="1250" b="1" dirty="0">
                 <a:solidFill>
                   <a:srgbClr val="0072B2"/>
                 </a:solidFill>
@@ -8432,7 +9788,7 @@
               <a:t>●  </a:t>
             </a:r>
             <a:r>
-              <a:rPr sz="1250">
+              <a:rPr sz="1250" dirty="0">
                 <a:solidFill>
                   <a:srgbClr val="222B33"/>
                 </a:solidFill>
@@ -8459,8 +9815,8 @@
         </p:blipFill>
         <p:spPr>
           <a:xfrm>
-            <a:off x="6172200" y="1699631"/>
-            <a:ext cx="5486400" cy="4464577"/>
+            <a:off x="4843731" y="1129223"/>
+            <a:ext cx="6646653" cy="5408737"/>
           </a:xfrm>
           <a:prstGeom prst="rect">
             <a:avLst/>
@@ -8498,6 +9854,67 @@
                 <a:latin typeface="Calibri"/>
               </a:rPr>
               <a:t>6</a:t>
+            </a:r>
+          </a:p>
+        </p:txBody>
+      </p:sp>
+      <p:sp>
+        <p:nvSpPr>
+          <p:cNvPr id="13" name="TextBox 12">
+            <a:extLst>
+              <a:ext uri="{FF2B5EF4-FFF2-40B4-BE49-F238E27FC236}">
+                <a16:creationId xmlns:a16="http://schemas.microsoft.com/office/drawing/2014/main" id="{3B9C491E-B384-FBFE-B5F3-829A390AC664}"/>
+              </a:ext>
+            </a:extLst>
+          </p:cNvPr>
+          <p:cNvSpPr txBox="1"/>
+          <p:nvPr/>
+        </p:nvSpPr>
+        <p:spPr>
+          <a:xfrm>
+            <a:off x="548640" y="1207008"/>
+            <a:ext cx="4428802" cy="592535"/>
+          </a:xfrm>
+          <a:prstGeom prst="rect">
+            <a:avLst/>
+          </a:prstGeom>
+          <a:noFill/>
+        </p:spPr>
+        <p:txBody>
+          <a:bodyPr wrap="square" anchor="t">
+            <a:spAutoFit/>
+          </a:bodyPr>
+          <a:lstStyle/>
+          <a:p>
+            <a:pPr>
+              <a:lnSpc>
+                <a:spcPct val="125000"/>
+              </a:lnSpc>
+            </a:pPr>
+            <a:r>
+              <a:rPr lang="en-US" sz="1350" b="1" dirty="0">
+                <a:solidFill>
+                  <a:srgbClr val="555F6B"/>
+                </a:solidFill>
+                <a:latin typeface="Calibri"/>
+              </a:rPr>
+              <a:t>Among the affordable, family-sized homes, we grouped</a:t>
+            </a:r>
+          </a:p>
+          <a:p>
+            <a:pPr>
+              <a:lnSpc>
+                <a:spcPct val="125000"/>
+              </a:lnSpc>
+            </a:pPr>
+            <a:r>
+              <a:rPr lang="en-US" sz="1350" b="1" dirty="0">
+                <a:solidFill>
+                  <a:srgbClr val="555F6B"/>
+                </a:solidFill>
+                <a:latin typeface="Calibri"/>
+              </a:rPr>
+              <a:t>by neighborhood and looked for areas that combine:</a:t>
             </a:r>
           </a:p>
         </p:txBody>
@@ -8535,6 +9952,30 @@
           <a:chExt cx="0" cy="0"/>
         </a:xfrm>
       </p:grpSpPr>
+      <p:pic>
+        <p:nvPicPr>
+          <p:cNvPr id="5" name="Picture 4" descr="hyp2_map.png"/>
+          <p:cNvPicPr>
+            <a:picLocks noChangeAspect="1"/>
+          </p:cNvPicPr>
+          <p:nvPr/>
+        </p:nvPicPr>
+        <p:blipFill>
+          <a:blip r:embed="rId3"/>
+          <a:stretch>
+            <a:fillRect/>
+          </a:stretch>
+        </p:blipFill>
+        <p:spPr>
+          <a:xfrm>
+            <a:off x="804986" y="1141476"/>
+            <a:ext cx="5722424" cy="5579364"/>
+          </a:xfrm>
+          <a:prstGeom prst="rect">
+            <a:avLst/>
+          </a:prstGeom>
+        </p:spPr>
+      </p:pic>
       <p:sp>
         <p:nvSpPr>
           <p:cNvPr id="2" name="Rectangle 1"/>
@@ -8624,7 +10065,7 @@
         <p:spPr>
           <a:xfrm>
             <a:off x="548640" y="621792"/>
-            <a:ext cx="10515600" cy="731520"/>
+            <a:ext cx="7969817" cy="553998"/>
           </a:xfrm>
           <a:prstGeom prst="rect">
             <a:avLst/>
@@ -8650,30 +10091,6 @@
           </a:p>
         </p:txBody>
       </p:sp>
-      <p:pic>
-        <p:nvPicPr>
-          <p:cNvPr id="5" name="Picture 4" descr="hyp2_map.png"/>
-          <p:cNvPicPr>
-            <a:picLocks noChangeAspect="1"/>
-          </p:cNvPicPr>
-          <p:nvPr/>
-        </p:nvPicPr>
-        <p:blipFill>
-          <a:blip r:embed="rId2"/>
-          <a:stretch>
-            <a:fillRect/>
-          </a:stretch>
-        </p:blipFill>
-        <p:spPr>
-          <a:xfrm>
-            <a:off x="623668" y="1554480"/>
-            <a:ext cx="4970584" cy="4846320"/>
-          </a:xfrm>
-          <a:prstGeom prst="rect">
-            <a:avLst/>
-          </a:prstGeom>
-        </p:spPr>
-      </p:pic>
       <p:sp>
         <p:nvSpPr>
           <p:cNvPr id="6" name="Rounded Rectangle 5"/>
@@ -8682,8 +10099,8 @@
         </p:nvSpPr>
         <p:spPr>
           <a:xfrm>
-            <a:off x="5989320" y="1554480"/>
-            <a:ext cx="5577840" cy="2331720"/>
+            <a:off x="6716150" y="1656081"/>
+            <a:ext cx="4217572" cy="2070330"/>
           </a:xfrm>
           <a:prstGeom prst="roundRect">
             <a:avLst>
@@ -8731,8 +10148,8 @@
         </p:nvSpPr>
         <p:spPr>
           <a:xfrm>
-            <a:off x="5989320" y="1554480"/>
-            <a:ext cx="109728" cy="2331720"/>
+            <a:off x="6716150" y="1656081"/>
+            <a:ext cx="109728" cy="2070330"/>
           </a:xfrm>
           <a:prstGeom prst="rect">
             <a:avLst/>
@@ -8776,8 +10193,8 @@
         </p:nvSpPr>
         <p:spPr>
           <a:xfrm>
-            <a:off x="6309360" y="1691640"/>
-            <a:ext cx="5029200" cy="365760"/>
+            <a:off x="7036190" y="1793241"/>
+            <a:ext cx="3342327" cy="323165"/>
           </a:xfrm>
           <a:prstGeom prst="rect">
             <a:avLst/>
@@ -8792,7 +10209,7 @@
           <a:p>
             <a:pPr algn="l"/>
             <a:r>
-              <a:rPr sz="1500" b="1" i="0">
+              <a:rPr sz="1500" b="1" i="0" dirty="0">
                 <a:solidFill>
                   <a:srgbClr val="7A6000"/>
                 </a:solidFill>
@@ -8811,8 +10228,8 @@
         </p:nvSpPr>
         <p:spPr>
           <a:xfrm>
-            <a:off x="6309360" y="2103120"/>
-            <a:ext cx="4937760" cy="1656864"/>
+            <a:off x="7036190" y="2204721"/>
+            <a:ext cx="3897532" cy="1361911"/>
           </a:xfrm>
           <a:prstGeom prst="rect">
             <a:avLst/>
@@ -8849,7 +10266,7 @@
               <a:t>130 affordable, family-sized homes — by far the most</a:t>
             </a:r>
             <a:br>
-              <a:rPr sz="1250" dirty="0">
+              <a:rPr lang="en-US" sz="1250" dirty="0">
                 <a:solidFill>
                   <a:srgbClr val="222B33"/>
                 </a:solidFill>
@@ -8923,22 +10340,6 @@
             </a:endParaRPr>
           </a:p>
           <a:p>
-            <a:pPr marL="182562" indent="-182562" algn="l">
-              <a:spcAft>
-                <a:spcPts val="800"/>
-              </a:spcAft>
-            </a:pPr>
-            <a:r>
-              <a:rPr lang="en-US" sz="1250" dirty="0">
-                <a:solidFill>
-                  <a:srgbClr val="222B33"/>
-                </a:solidFill>
-                <a:latin typeface="Calibri"/>
-              </a:rPr>
-              <a:t> Only Build quality is less</a:t>
-            </a:r>
-          </a:p>
-          <a:p>
             <a:pPr marL="182562" indent="-182562">
               <a:spcAft>
                 <a:spcPts val="800"/>
@@ -8971,8 +10372,8 @@
         </p:nvSpPr>
         <p:spPr>
           <a:xfrm>
-            <a:off x="5989320" y="4114800"/>
-            <a:ext cx="5577840" cy="2286000"/>
+            <a:off x="6716150" y="4216401"/>
+            <a:ext cx="4217572" cy="1684215"/>
           </a:xfrm>
           <a:prstGeom prst="roundRect">
             <a:avLst>
@@ -9020,8 +10421,8 @@
         </p:nvSpPr>
         <p:spPr>
           <a:xfrm>
-            <a:off x="5989320" y="4114800"/>
-            <a:ext cx="109728" cy="2286000"/>
+            <a:off x="6716150" y="4216401"/>
+            <a:ext cx="109728" cy="1684215"/>
           </a:xfrm>
           <a:prstGeom prst="rect">
             <a:avLst/>
@@ -9065,8 +10466,8 @@
         </p:nvSpPr>
         <p:spPr>
           <a:xfrm>
-            <a:off x="6309360" y="4251960"/>
-            <a:ext cx="5029200" cy="365760"/>
+            <a:off x="7036190" y="4353561"/>
+            <a:ext cx="3584917" cy="323165"/>
           </a:xfrm>
           <a:prstGeom prst="rect">
             <a:avLst/>
@@ -9081,7 +10482,7 @@
           <a:p>
             <a:pPr algn="l"/>
             <a:r>
-              <a:rPr sz="1500" b="1" i="0">
+              <a:rPr sz="1500" b="1" i="0" dirty="0">
                 <a:solidFill>
                   <a:srgbClr val="0072B2"/>
                 </a:solidFill>
@@ -9100,8 +10501,8 @@
         </p:nvSpPr>
         <p:spPr>
           <a:xfrm>
-            <a:off x="6309360" y="4663440"/>
-            <a:ext cx="4937760" cy="1645920"/>
+            <a:off x="7036190" y="4765041"/>
+            <a:ext cx="3725594" cy="874598"/>
           </a:xfrm>
           <a:prstGeom prst="rect">
             <a:avLst/>
@@ -9120,7 +10521,7 @@
               </a:spcAft>
             </a:pPr>
             <a:r>
-              <a:rPr sz="1250" b="1">
+              <a:rPr sz="1250" b="1" dirty="0">
                 <a:solidFill>
                   <a:srgbClr val="0072B2"/>
                 </a:solidFill>
@@ -9129,7 +10530,7 @@
               <a:t>●  </a:t>
             </a:r>
             <a:r>
-              <a:rPr sz="1250">
+              <a:rPr sz="1250" dirty="0">
                 <a:solidFill>
                   <a:srgbClr val="222B33"/>
                 </a:solidFill>
@@ -9145,7 +10546,7 @@
               </a:spcAft>
             </a:pPr>
             <a:r>
-              <a:rPr sz="1250" b="1">
+              <a:rPr sz="1250" b="1" dirty="0">
                 <a:solidFill>
                   <a:srgbClr val="0072B2"/>
                 </a:solidFill>
@@ -9154,7 +10555,7 @@
               <a:t>●  </a:t>
             </a:r>
             <a:r>
-              <a:rPr sz="1250">
+              <a:rPr sz="1250" dirty="0">
                 <a:solidFill>
                   <a:srgbClr val="222B33"/>
                 </a:solidFill>
@@ -9170,7 +10571,7 @@
               </a:spcAft>
             </a:pPr>
             <a:r>
-              <a:rPr sz="1250" b="1">
+              <a:rPr sz="1250" b="1" dirty="0">
                 <a:solidFill>
                   <a:srgbClr val="0072B2"/>
                 </a:solidFill>
@@ -9179,7 +10580,7 @@
               <a:t>●  </a:t>
             </a:r>
             <a:r>
-              <a:rPr sz="1250">
+              <a:rPr sz="1250" dirty="0">
                 <a:solidFill>
                   <a:srgbClr val="222B33"/>
                 </a:solidFill>
@@ -9258,6 +10659,30 @@
           <a:chExt cx="0" cy="0"/>
         </a:xfrm>
       </p:grpSpPr>
+      <p:pic>
+        <p:nvPicPr>
+          <p:cNvPr id="15" name="Picture 14" descr="hyp3_monthly_price.png"/>
+          <p:cNvPicPr>
+            <a:picLocks noChangeAspect="1"/>
+          </p:cNvPicPr>
+          <p:nvPr/>
+        </p:nvPicPr>
+        <p:blipFill>
+          <a:blip r:embed="rId2"/>
+          <a:stretch>
+            <a:fillRect/>
+          </a:stretch>
+        </p:blipFill>
+        <p:spPr>
+          <a:xfrm>
+            <a:off x="4100130" y="1353312"/>
+            <a:ext cx="7102653" cy="4630022"/>
+          </a:xfrm>
+          <a:prstGeom prst="rect">
+            <a:avLst/>
+          </a:prstGeom>
+        </p:spPr>
+      </p:pic>
       <p:sp>
         <p:nvSpPr>
           <p:cNvPr id="2" name="Rectangle 1"/>
@@ -9382,7 +10807,7 @@
         <p:spPr>
           <a:xfrm>
             <a:off x="548640" y="1554480"/>
-            <a:ext cx="5212080" cy="822960"/>
+            <a:ext cx="4204515" cy="592535"/>
           </a:xfrm>
           <a:prstGeom prst="rect">
             <a:avLst/>
@@ -9401,7 +10826,7 @@
               </a:lnSpc>
             </a:pPr>
             <a:r>
-              <a:rPr sz="1350" b="0" i="0">
+              <a:rPr sz="1350" b="1" i="0" dirty="0">
                 <a:solidFill>
                   <a:srgbClr val="555F6B"/>
                 </a:solidFill>
@@ -9417,7 +10842,7 @@
               </a:lnSpc>
             </a:pPr>
             <a:r>
-              <a:rPr sz="1350" b="0" i="0">
+              <a:rPr sz="1350" b="1" i="0" dirty="0">
                 <a:solidFill>
                   <a:srgbClr val="555F6B"/>
                 </a:solidFill>
@@ -9436,8 +10861,8 @@
         </p:nvSpPr>
         <p:spPr>
           <a:xfrm>
-            <a:off x="548640" y="2514600"/>
-            <a:ext cx="5212080" cy="1005840"/>
+            <a:off x="1230123" y="2247180"/>
+            <a:ext cx="2169543" cy="1005840"/>
           </a:xfrm>
           <a:prstGeom prst="roundRect">
             <a:avLst>
@@ -9485,8 +10910,8 @@
         </p:nvSpPr>
         <p:spPr>
           <a:xfrm>
-            <a:off x="548640" y="2587752"/>
-            <a:ext cx="5212080" cy="553212"/>
+            <a:off x="1727437" y="2273328"/>
+            <a:ext cx="1121434" cy="523220"/>
           </a:xfrm>
           <a:prstGeom prst="rect">
             <a:avLst/>
@@ -9501,7 +10926,7 @@
           <a:p>
             <a:pPr algn="ctr"/>
             <a:r>
-              <a:rPr sz="2800" b="1" i="0">
+              <a:rPr sz="2800" b="1" i="0" dirty="0">
                 <a:solidFill>
                   <a:srgbClr val="56B4E9"/>
                 </a:solidFill>
@@ -9520,8 +10945,8 @@
         </p:nvSpPr>
         <p:spPr>
           <a:xfrm>
-            <a:off x="685800" y="3089208"/>
-            <a:ext cx="4937760" cy="402336"/>
+            <a:off x="1367279" y="2754072"/>
+            <a:ext cx="1841740" cy="456472"/>
           </a:xfrm>
           <a:prstGeom prst="rect">
             <a:avLst/>
@@ -9540,7 +10965,7 @@
               </a:lnSpc>
             </a:pPr>
             <a:r>
-              <a:rPr sz="1150" b="0" i="0">
+              <a:rPr sz="1150" b="0" i="0" dirty="0">
                 <a:solidFill>
                   <a:srgbClr val="555F6B"/>
                 </a:solidFill>
@@ -9556,7 +10981,7 @@
               </a:lnSpc>
             </a:pPr>
             <a:r>
-              <a:rPr sz="1150" b="0" i="0">
+              <a:rPr sz="1150" b="0" i="0" dirty="0">
                 <a:solidFill>
                   <a:srgbClr val="555F6B"/>
                 </a:solidFill>
@@ -9575,8 +11000,8 @@
         </p:nvSpPr>
         <p:spPr>
           <a:xfrm>
-            <a:off x="548640" y="3657600"/>
-            <a:ext cx="5212080" cy="1005840"/>
+            <a:off x="1230123" y="3390180"/>
+            <a:ext cx="2169543" cy="1005840"/>
           </a:xfrm>
           <a:prstGeom prst="roundRect">
             <a:avLst>
@@ -9624,8 +11049,8 @@
         </p:nvSpPr>
         <p:spPr>
           <a:xfrm>
-            <a:off x="548640" y="3730752"/>
-            <a:ext cx="5212080" cy="553212"/>
+            <a:off x="1603213" y="3397494"/>
+            <a:ext cx="1245658" cy="523220"/>
           </a:xfrm>
           <a:prstGeom prst="rect">
             <a:avLst/>
@@ -9659,8 +11084,8 @@
         </p:nvSpPr>
         <p:spPr>
           <a:xfrm>
-            <a:off x="685800" y="4232208"/>
-            <a:ext cx="4937760" cy="402336"/>
+            <a:off x="1444921" y="3872800"/>
+            <a:ext cx="1617453" cy="456472"/>
           </a:xfrm>
           <a:prstGeom prst="rect">
             <a:avLst/>
@@ -9714,8 +11139,8 @@
         </p:nvSpPr>
         <p:spPr>
           <a:xfrm>
-            <a:off x="548640" y="4800600"/>
-            <a:ext cx="5212080" cy="1005840"/>
+            <a:off x="1230123" y="4533180"/>
+            <a:ext cx="2169543" cy="1005840"/>
           </a:xfrm>
           <a:prstGeom prst="roundRect">
             <a:avLst>
@@ -9763,8 +11188,8 @@
         </p:nvSpPr>
         <p:spPr>
           <a:xfrm>
-            <a:off x="548640" y="4873752"/>
-            <a:ext cx="5212080" cy="553212"/>
+            <a:off x="1603213" y="4533180"/>
+            <a:ext cx="1176647" cy="523220"/>
           </a:xfrm>
           <a:prstGeom prst="rect">
             <a:avLst/>
@@ -9779,7 +11204,7 @@
           <a:p>
             <a:pPr algn="ctr"/>
             <a:r>
-              <a:rPr sz="2800" b="1" i="0">
+              <a:rPr sz="2800" b="1" i="0" dirty="0">
                 <a:solidFill>
                   <a:srgbClr val="0072B2"/>
                 </a:solidFill>
@@ -9798,8 +11223,8 @@
         </p:nvSpPr>
         <p:spPr>
           <a:xfrm>
-            <a:off x="685800" y="5366582"/>
-            <a:ext cx="4937760" cy="402336"/>
+            <a:off x="1406101" y="5013101"/>
+            <a:ext cx="1695091" cy="456472"/>
           </a:xfrm>
           <a:prstGeom prst="rect">
             <a:avLst/>
@@ -9845,30 +11270,6 @@
           </a:p>
         </p:txBody>
       </p:sp>
-      <p:pic>
-        <p:nvPicPr>
-          <p:cNvPr id="15" name="Picture 14" descr="hyp3_monthly_price.png"/>
-          <p:cNvPicPr>
-            <a:picLocks noChangeAspect="1"/>
-          </p:cNvPicPr>
-          <p:nvPr/>
-        </p:nvPicPr>
-        <p:blipFill>
-          <a:blip r:embed="rId2"/>
-          <a:stretch>
-            <a:fillRect/>
-          </a:stretch>
-        </p:blipFill>
-        <p:spPr>
-          <a:xfrm>
-            <a:off x="5989320" y="1870398"/>
-            <a:ext cx="5623560" cy="3665843"/>
-          </a:xfrm>
-          <a:prstGeom prst="rect">
-            <a:avLst/>
-          </a:prstGeom>
-        </p:spPr>
-      </p:pic>
       <p:sp>
         <p:nvSpPr>
           <p:cNvPr id="16" name="Rectangle 15"/>
@@ -9922,8 +11323,8 @@
         </p:nvSpPr>
         <p:spPr>
           <a:xfrm>
-            <a:off x="777240" y="6108192"/>
-            <a:ext cx="10607040" cy="457200"/>
+            <a:off x="533400" y="6145690"/>
+            <a:ext cx="8085407" cy="323165"/>
           </a:xfrm>
           <a:prstGeom prst="rect">
             <a:avLst/>
@@ -9938,7 +11339,7 @@
           <a:p>
             <a:pPr algn="l"/>
             <a:r>
-              <a:rPr sz="1500" b="1" i="0">
+              <a:rPr sz="1500" b="1" i="0" dirty="0">
                 <a:solidFill>
                   <a:srgbClr val="F0E442"/>
                 </a:solidFill>
@@ -9995,14 +11396,6 @@
 <file path=ppt/slides/slide9.xml><?xml version="1.0" encoding="utf-8"?>
 <p:sld xmlns:a="http://schemas.openxmlformats.org/drawingml/2006/main" xmlns:r="http://schemas.openxmlformats.org/officeDocument/2006/relationships" xmlns:p="http://schemas.openxmlformats.org/presentationml/2006/main">
   <p:cSld>
-    <p:bg>
-      <p:bgPr>
-        <a:solidFill>
-          <a:srgbClr val="FFFFFF"/>
-        </a:solidFill>
-        <a:effectLst/>
-      </p:bgPr>
-    </p:bg>
     <p:spTree>
       <p:nvGrpSpPr>
         <p:cNvPr id="1" name=""/>
@@ -10017,6 +11410,30 @@
           <a:chExt cx="0" cy="0"/>
         </a:xfrm>
       </p:grpSpPr>
+      <p:pic>
+        <p:nvPicPr>
+          <p:cNvPr id="13" name="Picture 12" descr="hyp3_by_zipcode.png"/>
+          <p:cNvPicPr>
+            <a:picLocks noChangeAspect="1"/>
+          </p:cNvPicPr>
+          <p:nvPr/>
+        </p:nvPicPr>
+        <p:blipFill>
+          <a:blip r:embed="rId2"/>
+          <a:stretch>
+            <a:fillRect/>
+          </a:stretch>
+        </p:blipFill>
+        <p:spPr>
+          <a:xfrm>
+            <a:off x="4196157" y="1183606"/>
+            <a:ext cx="7259953" cy="4732562"/>
+          </a:xfrm>
+          <a:prstGeom prst="rect">
+            <a:avLst/>
+          </a:prstGeom>
+        </p:spPr>
+      </p:pic>
       <p:sp>
         <p:nvSpPr>
           <p:cNvPr id="2" name="Rectangle 1"/>
@@ -10092,7 +11509,7 @@
                 </a:solidFill>
                 <a:latin typeface="Calibri"/>
               </a:rPr>
-              <a:t>SUMMARY</a:t>
+              <a:t>QUESTION 3 — TIMING</a:t>
             </a:r>
           </a:p>
         </p:txBody>
@@ -10105,8 +11522,8 @@
         </p:nvSpPr>
         <p:spPr>
           <a:xfrm>
-            <a:off x="548640" y="621792"/>
-            <a:ext cx="10515600" cy="731520"/>
+            <a:off x="548639" y="621792"/>
+            <a:ext cx="7477761" cy="553998"/>
           </a:xfrm>
           <a:prstGeom prst="rect">
             <a:avLst/>
@@ -10127,7 +11544,7 @@
                 </a:solidFill>
                 <a:latin typeface="Calibri"/>
               </a:rPr>
-              <a:t>Key insights</a:t>
+              <a:t>Does the pattern hold within each zipcode?</a:t>
             </a:r>
           </a:p>
         </p:txBody>
@@ -10140,12 +11557,239 @@
         </p:nvSpPr>
         <p:spPr>
           <a:xfrm>
-            <a:off x="548640" y="1737360"/>
-            <a:ext cx="11109960" cy="1463040"/>
+            <a:off x="548640" y="1983105"/>
+            <a:ext cx="3437206" cy="1516966"/>
           </a:xfrm>
           <a:prstGeom prst="roundRect">
             <a:avLst>
-              <a:gd name="adj" fmla="val 10000"/>
+              <a:gd name="adj" fmla="val 8000"/>
+            </a:avLst>
+          </a:prstGeom>
+          <a:solidFill>
+            <a:srgbClr val="FDF6CF"/>
+          </a:solidFill>
+          <a:ln w="9525">
+            <a:solidFill>
+              <a:srgbClr val="DDE3EA"/>
+            </a:solidFill>
+          </a:ln>
+          <a:effectLst/>
+        </p:spPr>
+        <p:style>
+          <a:lnRef idx="1">
+            <a:schemeClr val="accent1"/>
+          </a:lnRef>
+          <a:fillRef idx="3">
+            <a:schemeClr val="accent1"/>
+          </a:fillRef>
+          <a:effectRef idx="2">
+            <a:schemeClr val="accent1"/>
+          </a:effectRef>
+          <a:fontRef idx="minor">
+            <a:schemeClr val="lt1"/>
+          </a:fontRef>
+        </p:style>
+        <p:txBody>
+          <a:bodyPr rtlCol="0" anchor="ctr"/>
+          <a:lstStyle/>
+          <a:p>
+            <a:pPr algn="ctr"/>
+            <a:endParaRPr/>
+          </a:p>
+        </p:txBody>
+      </p:sp>
+      <p:sp>
+        <p:nvSpPr>
+          <p:cNvPr id="6" name="Rectangle 5"/>
+          <p:cNvSpPr/>
+          <p:nvPr/>
+        </p:nvSpPr>
+        <p:spPr>
+          <a:xfrm>
+            <a:off x="548640" y="1983105"/>
+            <a:ext cx="109728" cy="1516966"/>
+          </a:xfrm>
+          <a:prstGeom prst="rect">
+            <a:avLst/>
+          </a:prstGeom>
+          <a:solidFill>
+            <a:srgbClr val="F0E442"/>
+          </a:solidFill>
+          <a:ln>
+            <a:noFill/>
+          </a:ln>
+          <a:effectLst/>
+        </p:spPr>
+        <p:style>
+          <a:lnRef idx="1">
+            <a:schemeClr val="accent1"/>
+          </a:lnRef>
+          <a:fillRef idx="3">
+            <a:schemeClr val="accent1"/>
+          </a:fillRef>
+          <a:effectRef idx="2">
+            <a:schemeClr val="accent1"/>
+          </a:effectRef>
+          <a:fontRef idx="minor">
+            <a:schemeClr val="lt1"/>
+          </a:fontRef>
+        </p:style>
+        <p:txBody>
+          <a:bodyPr rtlCol="0" anchor="ctr"/>
+          <a:lstStyle/>
+          <a:p>
+            <a:pPr algn="ctr"/>
+            <a:endParaRPr/>
+          </a:p>
+        </p:txBody>
+      </p:sp>
+      <p:sp>
+        <p:nvSpPr>
+          <p:cNvPr id="7" name="TextBox 6"/>
+          <p:cNvSpPr txBox="1"/>
+          <p:nvPr/>
+        </p:nvSpPr>
+        <p:spPr>
+          <a:xfrm>
+            <a:off x="868680" y="2120265"/>
+            <a:ext cx="4732020" cy="365760"/>
+          </a:xfrm>
+          <a:prstGeom prst="rect">
+            <a:avLst/>
+          </a:prstGeom>
+          <a:noFill/>
+        </p:spPr>
+        <p:txBody>
+          <a:bodyPr wrap="square" anchor="t">
+            <a:spAutoFit/>
+          </a:bodyPr>
+          <a:lstStyle/>
+          <a:p>
+            <a:pPr algn="l"/>
+            <a:r>
+              <a:rPr sz="1500" b="1" i="0">
+                <a:solidFill>
+                  <a:srgbClr val="7A6000"/>
+                </a:solidFill>
+                <a:latin typeface="Calibri"/>
+              </a:rPr>
+              <a:t>★  ZIP CODE 98023</a:t>
+            </a:r>
+          </a:p>
+        </p:txBody>
+      </p:sp>
+      <p:sp>
+        <p:nvSpPr>
+          <p:cNvPr id="8" name="TextBox 7"/>
+          <p:cNvSpPr txBox="1"/>
+          <p:nvPr/>
+        </p:nvSpPr>
+        <p:spPr>
+          <a:xfrm>
+            <a:off x="868679" y="2531745"/>
+            <a:ext cx="3117167" cy="874598"/>
+          </a:xfrm>
+          <a:prstGeom prst="rect">
+            <a:avLst/>
+          </a:prstGeom>
+          <a:noFill/>
+        </p:spPr>
+        <p:txBody>
+          <a:bodyPr wrap="square">
+            <a:spAutoFit/>
+          </a:bodyPr>
+          <a:lstStyle/>
+          <a:p>
+            <a:pPr marL="182562" indent="-182562" algn="l">
+              <a:spcAft>
+                <a:spcPts val="800"/>
+              </a:spcAft>
+            </a:pPr>
+            <a:r>
+              <a:rPr sz="1250" b="1" dirty="0">
+                <a:solidFill>
+                  <a:srgbClr val="9A7B00"/>
+                </a:solidFill>
+                <a:latin typeface="Calibri"/>
+              </a:rPr>
+              <a:t>●  </a:t>
+            </a:r>
+            <a:r>
+              <a:rPr sz="1250" dirty="0">
+                <a:solidFill>
+                  <a:srgbClr val="222B33"/>
+                </a:solidFill>
+                <a:latin typeface="Calibri"/>
+              </a:rPr>
+              <a:t>~17% price swing across the year</a:t>
+            </a:r>
+          </a:p>
+          <a:p>
+            <a:pPr marL="182562" indent="-182562" algn="l">
+              <a:spcAft>
+                <a:spcPts val="800"/>
+              </a:spcAft>
+            </a:pPr>
+            <a:r>
+              <a:rPr sz="1250" b="1" dirty="0">
+                <a:solidFill>
+                  <a:srgbClr val="9A7B00"/>
+                </a:solidFill>
+                <a:latin typeface="Calibri"/>
+              </a:rPr>
+              <a:t>●  </a:t>
+            </a:r>
+            <a:r>
+              <a:rPr sz="1250" dirty="0">
+                <a:solidFill>
+                  <a:srgbClr val="222B33"/>
+                </a:solidFill>
+                <a:latin typeface="Calibri"/>
+              </a:rPr>
+              <a:t>Cheapest month: June (avg $241,512)</a:t>
+            </a:r>
+          </a:p>
+          <a:p>
+            <a:pPr marL="182562" indent="-182562" algn="l">
+              <a:spcAft>
+                <a:spcPts val="800"/>
+              </a:spcAft>
+            </a:pPr>
+            <a:r>
+              <a:rPr sz="1250" b="1" dirty="0">
+                <a:solidFill>
+                  <a:srgbClr val="9A7B00"/>
+                </a:solidFill>
+                <a:latin typeface="Calibri"/>
+              </a:rPr>
+              <a:t>●  </a:t>
+            </a:r>
+            <a:r>
+              <a:rPr sz="1250" dirty="0">
+                <a:solidFill>
+                  <a:srgbClr val="222B33"/>
+                </a:solidFill>
+                <a:latin typeface="Calibri"/>
+              </a:rPr>
+              <a:t>Priciest month: February (avg $287,922)</a:t>
+            </a:r>
+          </a:p>
+        </p:txBody>
+      </p:sp>
+      <p:sp>
+        <p:nvSpPr>
+          <p:cNvPr id="9" name="Rounded Rectangle 8"/>
+          <p:cNvSpPr/>
+          <p:nvPr/>
+        </p:nvSpPr>
+        <p:spPr>
+          <a:xfrm>
+            <a:off x="548640" y="3763590"/>
+            <a:ext cx="3437206" cy="1516966"/>
+          </a:xfrm>
+          <a:prstGeom prst="roundRect">
+            <a:avLst>
+              <a:gd name="adj" fmla="val 8000"/>
             </a:avLst>
           </a:prstGeom>
           <a:solidFill>
@@ -10183,191 +11827,16 @@
       </p:sp>
       <p:sp>
         <p:nvSpPr>
-          <p:cNvPr id="6" name="Oval 5"/>
+          <p:cNvPr id="10" name="Rectangle 9"/>
           <p:cNvSpPr/>
           <p:nvPr/>
         </p:nvSpPr>
         <p:spPr>
           <a:xfrm>
-            <a:off x="868680" y="2057400"/>
-            <a:ext cx="822960" cy="822960"/>
-          </a:xfrm>
-          <a:prstGeom prst="ellipse">
-            <a:avLst/>
-          </a:prstGeom>
-          <a:solidFill>
-            <a:srgbClr val="56B4E9"/>
-          </a:solidFill>
-          <a:ln>
-            <a:noFill/>
-          </a:ln>
-          <a:effectLst/>
-        </p:spPr>
-        <p:style>
-          <a:lnRef idx="1">
-            <a:schemeClr val="accent1"/>
-          </a:lnRef>
-          <a:fillRef idx="3">
-            <a:schemeClr val="accent1"/>
-          </a:fillRef>
-          <a:effectRef idx="2">
-            <a:schemeClr val="accent1"/>
-          </a:effectRef>
-          <a:fontRef idx="minor">
-            <a:schemeClr val="lt1"/>
-          </a:fontRef>
-        </p:style>
-        <p:txBody>
-          <a:bodyPr wrap="square" rtlCol="0" anchor="ctr"/>
-          <a:lstStyle/>
-          <a:p>
-            <a:pPr algn="ctr"/>
-            <a:r>
-              <a:rPr sz="2600" b="1">
-                <a:solidFill>
-                  <a:srgbClr val="FFFFFF"/>
-                </a:solidFill>
-              </a:rPr>
-              <a:t>1</a:t>
-            </a:r>
-          </a:p>
-        </p:txBody>
-      </p:sp>
-      <p:sp>
-        <p:nvSpPr>
-          <p:cNvPr id="7" name="TextBox 6"/>
-          <p:cNvSpPr txBox="1"/>
-          <p:nvPr/>
-        </p:nvSpPr>
-        <p:spPr>
-          <a:xfrm>
-            <a:off x="1965960" y="1901952"/>
-            <a:ext cx="2926080" cy="365760"/>
-          </a:xfrm>
-          <a:prstGeom prst="rect">
-            <a:avLst/>
-          </a:prstGeom>
-          <a:noFill/>
-        </p:spPr>
-        <p:txBody>
-          <a:bodyPr wrap="square" anchor="t">
-            <a:spAutoFit/>
-          </a:bodyPr>
-          <a:lstStyle/>
-          <a:p>
-            <a:pPr algn="l"/>
-            <a:r>
-              <a:rPr sz="1700" b="1" i="0">
-                <a:solidFill>
-                  <a:srgbClr val="0B2A45"/>
-                </a:solidFill>
-                <a:latin typeface="Calibri"/>
-              </a:rPr>
-              <a:t>Feasibility</a:t>
-            </a:r>
-          </a:p>
-        </p:txBody>
-      </p:sp>
-      <p:sp>
-        <p:nvSpPr>
-          <p:cNvPr id="8" name="TextBox 7"/>
-          <p:cNvSpPr txBox="1"/>
-          <p:nvPr/>
-        </p:nvSpPr>
-        <p:spPr>
-          <a:xfrm>
-            <a:off x="1965960" y="2286000"/>
-            <a:ext cx="9418320" cy="822960"/>
-          </a:xfrm>
-          <a:prstGeom prst="rect">
-            <a:avLst/>
-          </a:prstGeom>
-          <a:noFill/>
-        </p:spPr>
-        <p:txBody>
-          <a:bodyPr wrap="square" anchor="t">
-            <a:spAutoFit/>
-          </a:bodyPr>
-          <a:lstStyle/>
-          <a:p>
-            <a:pPr algn="l">
-              <a:lnSpc>
-                <a:spcPct val="120000"/>
-              </a:lnSpc>
-            </a:pPr>
-            <a:r>
-              <a:rPr sz="1250" b="0" i="0">
-                <a:solidFill>
-                  <a:srgbClr val="222B33"/>
-                </a:solidFill>
-                <a:latin typeface="Calibri"/>
-              </a:rPr>
-              <a:t>Even on a strict budget, there are 1,227 homes with 4+ bedrooms available — a family of 7 is realistically housed in King County.</a:t>
-            </a:r>
-          </a:p>
-        </p:txBody>
-      </p:sp>
-      <p:sp>
-        <p:nvSpPr>
-          <p:cNvPr id="9" name="Rounded Rectangle 8"/>
-          <p:cNvSpPr/>
-          <p:nvPr/>
-        </p:nvSpPr>
-        <p:spPr>
-          <a:xfrm>
-            <a:off x="548640" y="3429000"/>
-            <a:ext cx="11109960" cy="1463040"/>
-          </a:xfrm>
-          <a:prstGeom prst="roundRect">
-            <a:avLst>
-              <a:gd name="adj" fmla="val 10000"/>
-            </a:avLst>
-          </a:prstGeom>
-          <a:solidFill>
-            <a:srgbClr val="F4F6F9"/>
-          </a:solidFill>
-          <a:ln w="9525">
-            <a:solidFill>
-              <a:srgbClr val="DDE3EA"/>
-            </a:solidFill>
-          </a:ln>
-          <a:effectLst/>
-        </p:spPr>
-        <p:style>
-          <a:lnRef idx="1">
-            <a:schemeClr val="accent1"/>
-          </a:lnRef>
-          <a:fillRef idx="3">
-            <a:schemeClr val="accent1"/>
-          </a:fillRef>
-          <a:effectRef idx="2">
-            <a:schemeClr val="accent1"/>
-          </a:effectRef>
-          <a:fontRef idx="minor">
-            <a:schemeClr val="lt1"/>
-          </a:fontRef>
-        </p:style>
-        <p:txBody>
-          <a:bodyPr rtlCol="0" anchor="ctr"/>
-          <a:lstStyle/>
-          <a:p>
-            <a:pPr algn="ctr"/>
-            <a:endParaRPr/>
-          </a:p>
-        </p:txBody>
-      </p:sp>
-      <p:sp>
-        <p:nvSpPr>
-          <p:cNvPr id="10" name="Oval 9"/>
-          <p:cNvSpPr/>
-          <p:nvPr/>
-        </p:nvSpPr>
-        <p:spPr>
-          <a:xfrm>
-            <a:off x="868680" y="3749040"/>
-            <a:ext cx="822960" cy="822960"/>
-          </a:xfrm>
-          <a:prstGeom prst="ellipse">
+            <a:off x="548640" y="3763590"/>
+            <a:ext cx="109728" cy="1516966"/>
+          </a:xfrm>
+          <a:prstGeom prst="rect">
             <a:avLst/>
           </a:prstGeom>
           <a:solidFill>
@@ -10393,18 +11862,11 @@
           </a:fontRef>
         </p:style>
         <p:txBody>
-          <a:bodyPr wrap="square" rtlCol="0" anchor="ctr"/>
+          <a:bodyPr rtlCol="0" anchor="ctr"/>
           <a:lstStyle/>
           <a:p>
             <a:pPr algn="ctr"/>
-            <a:r>
-              <a:rPr sz="2600" b="1">
-                <a:solidFill>
-                  <a:srgbClr val="FFFFFF"/>
-                </a:solidFill>
-              </a:rPr>
-              <a:t>2</a:t>
-            </a:r>
+            <a:endParaRPr/>
           </a:p>
         </p:txBody>
       </p:sp>
@@ -10416,8 +11878,8 @@
         </p:nvSpPr>
         <p:spPr>
           <a:xfrm>
-            <a:off x="1965960" y="3593592"/>
-            <a:ext cx="2926080" cy="365760"/>
+            <a:off x="868680" y="3900750"/>
+            <a:ext cx="4732020" cy="365760"/>
           </a:xfrm>
           <a:prstGeom prst="rect">
             <a:avLst/>
@@ -10432,13 +11894,13 @@
           <a:p>
             <a:pPr algn="l"/>
             <a:r>
-              <a:rPr sz="1700" b="1" i="0">
-                <a:solidFill>
-                  <a:srgbClr val="0B2A45"/>
-                </a:solidFill>
-                <a:latin typeface="Calibri"/>
-              </a:rPr>
-              <a:t>Location</a:t>
+              <a:rPr sz="1500" b="1" i="0">
+                <a:solidFill>
+                  <a:srgbClr val="0072B2"/>
+                </a:solidFill>
+                <a:latin typeface="Calibri"/>
+              </a:rPr>
+              <a:t>ZIP CODE 98092  (backup)</a:t>
             </a:r>
           </a:p>
         </p:txBody>
@@ -10451,8 +11913,8 @@
         </p:nvSpPr>
         <p:spPr>
           <a:xfrm>
-            <a:off x="1965960" y="3977640"/>
-            <a:ext cx="9418320" cy="822960"/>
+            <a:off x="868679" y="4312230"/>
+            <a:ext cx="3117167" cy="874598"/>
           </a:xfrm>
           <a:prstGeom prst="rect">
             <a:avLst/>
@@ -10460,89 +11922,99 @@
           <a:noFill/>
         </p:spPr>
         <p:txBody>
-          <a:bodyPr wrap="square" anchor="t">
+          <a:bodyPr wrap="square">
             <a:spAutoFit/>
           </a:bodyPr>
           <a:lstStyle/>
           <a:p>
-            <a:pPr algn="l">
-              <a:lnSpc>
-                <a:spcPct val="120000"/>
-              </a:lnSpc>
+            <a:pPr marL="182562" indent="-182562" algn="l">
+              <a:spcAft>
+                <a:spcPts val="800"/>
+              </a:spcAft>
             </a:pPr>
             <a:r>
-              <a:rPr sz="1250" b="0" i="0">
+              <a:rPr sz="1250" b="1" dirty="0">
+                <a:solidFill>
+                  <a:srgbClr val="0072B2"/>
+                </a:solidFill>
+                <a:latin typeface="Calibri"/>
+              </a:rPr>
+              <a:t>●  </a:t>
+            </a:r>
+            <a:r>
+              <a:rPr sz="1250" dirty="0">
                 <a:solidFill>
                   <a:srgbClr val="222B33"/>
                 </a:solidFill>
                 <a:latin typeface="Calibri"/>
               </a:rPr>
-              <a:t>Zip code 98023 stands out with the most affordable, family-sized homes of any neighborhood, at a price well under budget, with above-average condition and quality. 98092 is a strong backup.</a:t>
-            </a:r>
-          </a:p>
-        </p:txBody>
-      </p:sp>
-      <p:sp>
-        <p:nvSpPr>
-          <p:cNvPr id="13" name="Rounded Rectangle 12"/>
+              <a:t>~15% price swing across the year</a:t>
+            </a:r>
+          </a:p>
+          <a:p>
+            <a:pPr marL="182562" indent="-182562" algn="l">
+              <a:spcAft>
+                <a:spcPts val="800"/>
+              </a:spcAft>
+            </a:pPr>
+            <a:r>
+              <a:rPr sz="1250" b="1" dirty="0">
+                <a:solidFill>
+                  <a:srgbClr val="0072B2"/>
+                </a:solidFill>
+                <a:latin typeface="Calibri"/>
+              </a:rPr>
+              <a:t>●  </a:t>
+            </a:r>
+            <a:r>
+              <a:rPr sz="1250" dirty="0">
+                <a:solidFill>
+                  <a:srgbClr val="222B33"/>
+                </a:solidFill>
+                <a:latin typeface="Calibri"/>
+              </a:rPr>
+              <a:t>Cheapest month: May (avg $253,667)</a:t>
+            </a:r>
+          </a:p>
+          <a:p>
+            <a:pPr marL="182562" indent="-182562" algn="l">
+              <a:spcAft>
+                <a:spcPts val="800"/>
+              </a:spcAft>
+            </a:pPr>
+            <a:r>
+              <a:rPr sz="1250" b="1" dirty="0">
+                <a:solidFill>
+                  <a:srgbClr val="0072B2"/>
+                </a:solidFill>
+                <a:latin typeface="Calibri"/>
+              </a:rPr>
+              <a:t>●  </a:t>
+            </a:r>
+            <a:r>
+              <a:rPr sz="1250" dirty="0">
+                <a:solidFill>
+                  <a:srgbClr val="222B33"/>
+                </a:solidFill>
+                <a:latin typeface="Calibri"/>
+              </a:rPr>
+              <a:t>Priciest month: January (avg $296,612)</a:t>
+            </a:r>
+          </a:p>
+        </p:txBody>
+      </p:sp>
+      <p:sp>
+        <p:nvSpPr>
+          <p:cNvPr id="14" name="Rectangle 13"/>
           <p:cNvSpPr/>
           <p:nvPr/>
         </p:nvSpPr>
         <p:spPr>
           <a:xfrm>
-            <a:off x="548640" y="5120640"/>
-            <a:ext cx="11109960" cy="1463040"/>
-          </a:xfrm>
-          <a:prstGeom prst="roundRect">
-            <a:avLst>
-              <a:gd name="adj" fmla="val 10000"/>
-            </a:avLst>
-          </a:prstGeom>
-          <a:solidFill>
-            <a:srgbClr val="F4F6F9"/>
-          </a:solidFill>
-          <a:ln w="9525">
-            <a:solidFill>
-              <a:srgbClr val="DDE3EA"/>
-            </a:solidFill>
-          </a:ln>
-          <a:effectLst/>
-        </p:spPr>
-        <p:style>
-          <a:lnRef idx="1">
-            <a:schemeClr val="accent1"/>
-          </a:lnRef>
-          <a:fillRef idx="3">
-            <a:schemeClr val="accent1"/>
-          </a:fillRef>
-          <a:effectRef idx="2">
-            <a:schemeClr val="accent1"/>
-          </a:effectRef>
-          <a:fontRef idx="minor">
-            <a:schemeClr val="lt1"/>
-          </a:fontRef>
-        </p:style>
-        <p:txBody>
-          <a:bodyPr rtlCol="0" anchor="ctr"/>
-          <a:lstStyle/>
-          <a:p>
-            <a:pPr algn="ctr"/>
-            <a:endParaRPr/>
-          </a:p>
-        </p:txBody>
-      </p:sp>
-      <p:sp>
-        <p:nvSpPr>
-          <p:cNvPr id="14" name="Oval 13"/>
-          <p:cNvSpPr/>
-          <p:nvPr/>
-        </p:nvSpPr>
-        <p:spPr>
-          <a:xfrm>
-            <a:off x="868680" y="5440680"/>
-            <a:ext cx="822960" cy="822960"/>
-          </a:xfrm>
-          <a:prstGeom prst="ellipse">
+            <a:off x="548640" y="6035040"/>
+            <a:ext cx="11109960" cy="566928"/>
+          </a:xfrm>
+          <a:prstGeom prst="rect">
             <a:avLst/>
           </a:prstGeom>
           <a:solidFill>
@@ -10568,18 +12040,11 @@
           </a:fontRef>
         </p:style>
         <p:txBody>
-          <a:bodyPr wrap="square" rtlCol="0" anchor="ctr"/>
+          <a:bodyPr rtlCol="0" anchor="ctr"/>
           <a:lstStyle/>
           <a:p>
             <a:pPr algn="ctr"/>
-            <a:r>
-              <a:rPr sz="2600" b="1">
-                <a:solidFill>
-                  <a:srgbClr val="FFFFFF"/>
-                </a:solidFill>
-              </a:rPr>
-              <a:t>3</a:t>
-            </a:r>
+            <a:endParaRPr/>
           </a:p>
         </p:txBody>
       </p:sp>
@@ -10591,8 +12056,8 @@
         </p:nvSpPr>
         <p:spPr>
           <a:xfrm>
-            <a:off x="1965960" y="5285232"/>
-            <a:ext cx="2926080" cy="365760"/>
+            <a:off x="533400" y="6155264"/>
+            <a:ext cx="11245595" cy="323165"/>
           </a:xfrm>
           <a:prstGeom prst="rect">
             <a:avLst/>
@@ -10607,13 +12072,49 @@
           <a:p>
             <a:pPr algn="l"/>
             <a:r>
-              <a:rPr sz="1700" b="1" i="0">
-                <a:solidFill>
-                  <a:srgbClr val="0B2A45"/>
-                </a:solidFill>
-                <a:latin typeface="Calibri"/>
-              </a:rPr>
-              <a:t>Timing</a:t>
+              <a:rPr sz="1500" b="1" i="0" dirty="0">
+                <a:solidFill>
+                  <a:srgbClr val="F0E442"/>
+                </a:solidFill>
+                <a:latin typeface="Calibri"/>
+              </a:rPr>
+              <a:t>Answer: Each </a:t>
+            </a:r>
+            <a:r>
+              <a:rPr sz="1500" b="1" i="0" dirty="0" err="1">
+                <a:solidFill>
+                  <a:srgbClr val="F0E442"/>
+                </a:solidFill>
+                <a:latin typeface="Calibri"/>
+              </a:rPr>
+              <a:t>zipcode</a:t>
+            </a:r>
+            <a:r>
+              <a:rPr sz="1500" b="1" i="0" dirty="0">
+                <a:solidFill>
+                  <a:srgbClr val="F0E442"/>
+                </a:solidFill>
+                <a:latin typeface="Calibri"/>
+              </a:rPr>
+              <a:t> has its own seasonal pattern — the countywide “December is cheapest” doesn’t apply to 98023 or 98092</a:t>
+            </a:r>
+            <a:r>
+              <a:rPr lang="en-US" sz="1500" b="1" i="0" dirty="0">
+                <a:solidFill>
+                  <a:srgbClr val="F0E442"/>
+                </a:solidFill>
+                <a:latin typeface="Calibri"/>
+              </a:rPr>
+              <a:t> </a:t>
+            </a:r>
+            <a:r>
+              <a:rPr sz="1500" b="1" i="0" dirty="0">
+                <a:solidFill>
+                  <a:srgbClr val="F0E442"/>
+                </a:solidFill>
+                <a:latin typeface="Calibri"/>
+              </a:rPr>
+              <a:t>specifically.</a:t>
             </a:r>
           </a:p>
         </p:txBody>
@@ -10621,45 +12122,6 @@
       <p:sp>
         <p:nvSpPr>
           <p:cNvPr id="16" name="TextBox 15"/>
-          <p:cNvSpPr txBox="1"/>
-          <p:nvPr/>
-        </p:nvSpPr>
-        <p:spPr>
-          <a:xfrm>
-            <a:off x="1965960" y="5669280"/>
-            <a:ext cx="9418320" cy="822960"/>
-          </a:xfrm>
-          <a:prstGeom prst="rect">
-            <a:avLst/>
-          </a:prstGeom>
-          <a:noFill/>
-        </p:spPr>
-        <p:txBody>
-          <a:bodyPr wrap="square" anchor="t">
-            <a:spAutoFit/>
-          </a:bodyPr>
-          <a:lstStyle/>
-          <a:p>
-            <a:pPr algn="l">
-              <a:lnSpc>
-                <a:spcPct val="120000"/>
-              </a:lnSpc>
-            </a:pPr>
-            <a:r>
-              <a:rPr sz="1250" b="0" i="0">
-                <a:solidFill>
-                  <a:srgbClr val="222B33"/>
-                </a:solidFill>
-                <a:latin typeface="Calibri"/>
-              </a:rPr>
-              <a:t>Prices for this segment are fairly flat across the year (~8% swing). Location should drive the decision, not the calendar.</a:t>
-            </a:r>
-          </a:p>
-        </p:txBody>
-      </p:sp>
-      <p:sp>
-        <p:nvSpPr>
-          <p:cNvPr id="17" name="TextBox 16"/>
           <p:cNvSpPr txBox="1"/>
           <p:nvPr/>
         </p:nvSpPr>
@@ -11018,4 +12480,299 @@
   </a:objectDefaults>
   <a:extraClrSchemeLst/>
 </a:theme>
+</file>
+
+<file path=ppt/theme/theme2.xml><?xml version="1.0" encoding="utf-8"?>
+<a:theme xmlns:a="http://schemas.openxmlformats.org/drawingml/2006/main" name="Office Theme">
+  <a:themeElements>
+    <a:clrScheme name="Office">
+      <a:dk1>
+        <a:sysClr val="windowText" lastClr="000000"/>
+      </a:dk1>
+      <a:lt1>
+        <a:sysClr val="window" lastClr="FFFFFF"/>
+      </a:lt1>
+      <a:dk2>
+        <a:srgbClr val="44546A"/>
+      </a:dk2>
+      <a:lt2>
+        <a:srgbClr val="E7E6E6"/>
+      </a:lt2>
+      <a:accent1>
+        <a:srgbClr val="4472C4"/>
+      </a:accent1>
+      <a:accent2>
+        <a:srgbClr val="ED7D31"/>
+      </a:accent2>
+      <a:accent3>
+        <a:srgbClr val="A5A5A5"/>
+      </a:accent3>
+      <a:accent4>
+        <a:srgbClr val="FFC000"/>
+      </a:accent4>
+      <a:accent5>
+        <a:srgbClr val="5B9BD5"/>
+      </a:accent5>
+      <a:accent6>
+        <a:srgbClr val="70AD47"/>
+      </a:accent6>
+      <a:hlink>
+        <a:srgbClr val="0563C1"/>
+      </a:hlink>
+      <a:folHlink>
+        <a:srgbClr val="954F72"/>
+      </a:folHlink>
+    </a:clrScheme>
+    <a:fontScheme name="Office">
+      <a:majorFont>
+        <a:latin typeface="Calibri Light" panose="020F0302020204030204"/>
+        <a:ea typeface=""/>
+        <a:cs typeface=""/>
+        <a:font script="Jpan" typeface="游ゴシック Light"/>
+        <a:font script="Hang" typeface="맑은 고딕"/>
+        <a:font script="Hans" typeface="等线 Light"/>
+        <a:font script="Hant" typeface="新細明體"/>
+        <a:font script="Arab" typeface="Times New Roman"/>
+        <a:font script="Hebr" typeface="Times New Roman"/>
+        <a:font script="Thai" typeface="Angsana New"/>
+        <a:font script="Ethi" typeface="Nyala"/>
+        <a:font script="Beng" typeface="Vrinda"/>
+        <a:font script="Gujr" typeface="Shruti"/>
+        <a:font script="Khmr" typeface="MoolBoran"/>
+        <a:font script="Knda" typeface="Tunga"/>
+        <a:font script="Guru" typeface="Raavi"/>
+        <a:font script="Cans" typeface="Euphemia"/>
+        <a:font script="Cher" typeface="Plantagenet Cherokee"/>
+        <a:font script="Yiii" typeface="Microsoft Yi Baiti"/>
+        <a:font script="Tibt" typeface="Microsoft Himalaya"/>
+        <a:font script="Thaa" typeface="MV Boli"/>
+        <a:font script="Deva" typeface="Mangal"/>
+        <a:font script="Telu" typeface="Gautami"/>
+        <a:font script="Taml" typeface="Latha"/>
+        <a:font script="Syrc" typeface="Estrangelo Edessa"/>
+        <a:font script="Orya" typeface="Kalinga"/>
+        <a:font script="Mlym" typeface="Kartika"/>
+        <a:font script="Laoo" typeface="DokChampa"/>
+        <a:font script="Sinh" typeface="Iskoola Pota"/>
+        <a:font script="Mong" typeface="Mongolian Baiti"/>
+        <a:font script="Viet" typeface="Times New Roman"/>
+        <a:font script="Uigh" typeface="Microsoft Uighur"/>
+        <a:font script="Geor" typeface="Sylfaen"/>
+        <a:font script="Armn" typeface="Arial"/>
+        <a:font script="Bugi" typeface="Leelawadee UI"/>
+        <a:font script="Bopo" typeface="Microsoft JhengHei"/>
+        <a:font script="Java" typeface="Javanese Text"/>
+        <a:font script="Lisu" typeface="Segoe UI"/>
+        <a:font script="Mymr" typeface="Myanmar Text"/>
+        <a:font script="Nkoo" typeface="Ebrima"/>
+        <a:font script="Olck" typeface="Nirmala UI"/>
+        <a:font script="Osma" typeface="Ebrima"/>
+        <a:font script="Phag" typeface="Phagspa"/>
+        <a:font script="Syrn" typeface="Estrangelo Edessa"/>
+        <a:font script="Syrj" typeface="Estrangelo Edessa"/>
+        <a:font script="Syre" typeface="Estrangelo Edessa"/>
+        <a:font script="Sora" typeface="Nirmala UI"/>
+        <a:font script="Tale" typeface="Microsoft Tai Le"/>
+        <a:font script="Talu" typeface="Microsoft New Tai Lue"/>
+        <a:font script="Tfng" typeface="Ebrima"/>
+      </a:majorFont>
+      <a:minorFont>
+        <a:latin typeface="Calibri" panose="020F0502020204030204"/>
+        <a:ea typeface=""/>
+        <a:cs typeface=""/>
+        <a:font script="Jpan" typeface="游ゴシック"/>
+        <a:font script="Hang" typeface="맑은 고딕"/>
+        <a:font script="Hans" typeface="等线"/>
+        <a:font script="Hant" typeface="新細明體"/>
+        <a:font script="Arab" typeface="Arial"/>
+        <a:font script="Hebr" typeface="Arial"/>
+        <a:font script="Thai" typeface="Cordia New"/>
+        <a:font script="Ethi" typeface="Nyala"/>
+        <a:font script="Beng" typeface="Vrinda"/>
+        <a:font script="Gujr" typeface="Shruti"/>
+        <a:font script="Khmr" typeface="DaunPenh"/>
+        <a:font script="Knda" typeface="Tunga"/>
+        <a:font script="Guru" typeface="Raavi"/>
+        <a:font script="Cans" typeface="Euphemia"/>
+        <a:font script="Cher" typeface="Plantagenet Cherokee"/>
+        <a:font script="Yiii" typeface="Microsoft Yi Baiti"/>
+        <a:font script="Tibt" typeface="Microsoft Himalaya"/>
+        <a:font script="Thaa" typeface="MV Boli"/>
+        <a:font script="Deva" typeface="Mangal"/>
+        <a:font script="Telu" typeface="Gautami"/>
+        <a:font script="Taml" typeface="Latha"/>
+        <a:font script="Syrc" typeface="Estrangelo Edessa"/>
+        <a:font script="Orya" typeface="Kalinga"/>
+        <a:font script="Mlym" typeface="Kartika"/>
+        <a:font script="Laoo" typeface="DokChampa"/>
+        <a:font script="Sinh" typeface="Iskoola Pota"/>
+        <a:font script="Mong" typeface="Mongolian Baiti"/>
+        <a:font script="Viet" typeface="Arial"/>
+        <a:font script="Uigh" typeface="Microsoft Uighur"/>
+        <a:font script="Geor" typeface="Sylfaen"/>
+        <a:font script="Armn" typeface="Arial"/>
+        <a:font script="Bugi" typeface="Leelawadee UI"/>
+        <a:font script="Bopo" typeface="Microsoft JhengHei"/>
+        <a:font script="Java" typeface="Javanese Text"/>
+        <a:font script="Lisu" typeface="Segoe UI"/>
+        <a:font script="Mymr" typeface="Myanmar Text"/>
+        <a:font script="Nkoo" typeface="Ebrima"/>
+        <a:font script="Olck" typeface="Nirmala UI"/>
+        <a:font script="Osma" typeface="Ebrima"/>
+        <a:font script="Phag" typeface="Phagspa"/>
+        <a:font script="Syrn" typeface="Estrangelo Edessa"/>
+        <a:font script="Syrj" typeface="Estrangelo Edessa"/>
+        <a:font script="Syre" typeface="Estrangelo Edessa"/>
+        <a:font script="Sora" typeface="Nirmala UI"/>
+        <a:font script="Tale" typeface="Microsoft Tai Le"/>
+        <a:font script="Talu" typeface="Microsoft New Tai Lue"/>
+        <a:font script="Tfng" typeface="Ebrima"/>
+      </a:minorFont>
+    </a:fontScheme>
+    <a:fmtScheme name="Office">
+      <a:fillStyleLst>
+        <a:solidFill>
+          <a:schemeClr val="phClr"/>
+        </a:solidFill>
+        <a:gradFill rotWithShape="1">
+          <a:gsLst>
+            <a:gs pos="0">
+              <a:schemeClr val="phClr">
+                <a:lumMod val="110000"/>
+                <a:satMod val="105000"/>
+                <a:tint val="67000"/>
+              </a:schemeClr>
+            </a:gs>
+            <a:gs pos="50000">
+              <a:schemeClr val="phClr">
+                <a:lumMod val="105000"/>
+                <a:satMod val="103000"/>
+                <a:tint val="73000"/>
+              </a:schemeClr>
+            </a:gs>
+            <a:gs pos="100000">
+              <a:schemeClr val="phClr">
+                <a:lumMod val="105000"/>
+                <a:satMod val="109000"/>
+                <a:tint val="81000"/>
+              </a:schemeClr>
+            </a:gs>
+          </a:gsLst>
+          <a:lin ang="5400000" scaled="0"/>
+        </a:gradFill>
+        <a:gradFill rotWithShape="1">
+          <a:gsLst>
+            <a:gs pos="0">
+              <a:schemeClr val="phClr">
+                <a:satMod val="103000"/>
+                <a:lumMod val="102000"/>
+                <a:tint val="94000"/>
+              </a:schemeClr>
+            </a:gs>
+            <a:gs pos="50000">
+              <a:schemeClr val="phClr">
+                <a:satMod val="110000"/>
+                <a:lumMod val="100000"/>
+                <a:shade val="100000"/>
+              </a:schemeClr>
+            </a:gs>
+            <a:gs pos="100000">
+              <a:schemeClr val="phClr">
+                <a:lumMod val="99000"/>
+                <a:satMod val="120000"/>
+                <a:shade val="78000"/>
+              </a:schemeClr>
+            </a:gs>
+          </a:gsLst>
+          <a:lin ang="5400000" scaled="0"/>
+        </a:gradFill>
+      </a:fillStyleLst>
+      <a:lnStyleLst>
+        <a:ln w="6350" cap="flat" cmpd="sng" algn="ctr">
+          <a:solidFill>
+            <a:schemeClr val="phClr"/>
+          </a:solidFill>
+          <a:prstDash val="solid"/>
+          <a:miter lim="800000"/>
+        </a:ln>
+        <a:ln w="12700" cap="flat" cmpd="sng" algn="ctr">
+          <a:solidFill>
+            <a:schemeClr val="phClr"/>
+          </a:solidFill>
+          <a:prstDash val="solid"/>
+          <a:miter lim="800000"/>
+        </a:ln>
+        <a:ln w="19050" cap="flat" cmpd="sng" algn="ctr">
+          <a:solidFill>
+            <a:schemeClr val="phClr"/>
+          </a:solidFill>
+          <a:prstDash val="solid"/>
+          <a:miter lim="800000"/>
+        </a:ln>
+      </a:lnStyleLst>
+      <a:effectStyleLst>
+        <a:effectStyle>
+          <a:effectLst/>
+        </a:effectStyle>
+        <a:effectStyle>
+          <a:effectLst/>
+        </a:effectStyle>
+        <a:effectStyle>
+          <a:effectLst>
+            <a:outerShdw blurRad="57150" dist="19050" dir="5400000" algn="ctr" rotWithShape="0">
+              <a:srgbClr val="000000">
+                <a:alpha val="63000"/>
+              </a:srgbClr>
+            </a:outerShdw>
+          </a:effectLst>
+        </a:effectStyle>
+      </a:effectStyleLst>
+      <a:bgFillStyleLst>
+        <a:solidFill>
+          <a:schemeClr val="phClr"/>
+        </a:solidFill>
+        <a:solidFill>
+          <a:schemeClr val="phClr">
+            <a:tint val="95000"/>
+            <a:satMod val="170000"/>
+          </a:schemeClr>
+        </a:solidFill>
+        <a:gradFill rotWithShape="1">
+          <a:gsLst>
+            <a:gs pos="0">
+              <a:schemeClr val="phClr">
+                <a:tint val="93000"/>
+                <a:satMod val="150000"/>
+                <a:shade val="98000"/>
+                <a:lumMod val="102000"/>
+              </a:schemeClr>
+            </a:gs>
+            <a:gs pos="50000">
+              <a:schemeClr val="phClr">
+                <a:tint val="98000"/>
+                <a:satMod val="130000"/>
+                <a:shade val="90000"/>
+                <a:lumMod val="103000"/>
+              </a:schemeClr>
+            </a:gs>
+            <a:gs pos="100000">
+              <a:schemeClr val="phClr">
+                <a:shade val="63000"/>
+                <a:satMod val="120000"/>
+              </a:schemeClr>
+            </a:gs>
+          </a:gsLst>
+          <a:lin ang="5400000" scaled="0"/>
+        </a:gradFill>
+      </a:bgFillStyleLst>
+    </a:fmtScheme>
+  </a:themeElements>
+  <a:objectDefaults/>
+  <a:extraClrSchemeLst/>
+  <a:extLst>
+    <a:ext uri="{05A4C25C-085E-4340-85A3-A5531E510DB2}">
+      <thm15:themeFamily xmlns:thm15="http://schemas.microsoft.com/office/thememl/2012/main" name="Office Theme" id="{62F939B6-93AF-4DB8-9C6B-D6C7DFDC589F}" vid="{4A3C46E8-61CC-4603-A589-7422A47A8E4A}"/>
+    </a:ext>
+  </a:extLst>
+</a:theme>
 </file>
--- a/presentation/Thomas_Hansen_Housing_Recommendation.pptx
+++ b/presentation/Thomas_Hansen_Housing_Recommendation.pptx
@@ -5164,7 +5164,7 @@
                 </a:solidFill>
                 <a:latin typeface="Calibri"/>
               </a:rPr>
-              <a:t>10</a:t>
+              <a:t>11</a:t>
             </a:r>
           </a:p>
         </p:txBody>
@@ -5382,7 +5382,7 @@
                 </a:solidFill>
                 <a:latin typeface="Calibri"/>
               </a:rPr>
-              <a:t>11</a:t>
+              <a:t>12</a:t>
             </a:r>
           </a:p>
         </p:txBody>
